--- a/preview_v7/che/l-che-b1-u1-1.pptx
+++ b/preview_v7/che/l-che-b1-u1-1.pptx
@@ -3142,14 +3142,58 @@
       </p:sp>
       <p:sp>
         <p:nvSpPr>
-          <p:cNvPr id="3" name="TextBox 2"/>
+          <p:cNvPr id="3" name="Rectangle 2"/>
+          <p:cNvSpPr/>
+          <p:nvPr/>
+        </p:nvSpPr>
+        <p:spPr>
+          <a:xfrm>
+            <a:off x="640080" y="640080"/>
+            <a:ext cx="1005840" cy="50800"/>
+          </a:xfrm>
+          <a:prstGeom prst="rect">
+            <a:avLst/>
+          </a:prstGeom>
+          <a:solidFill>
+            <a:srgbClr val="C8A86B"/>
+          </a:solidFill>
+          <a:ln>
+            <a:noFill/>
+          </a:ln>
+          <a:effectLst/>
+        </p:spPr>
+        <p:style>
+          <a:lnRef idx="1">
+            <a:schemeClr val="accent1"/>
+          </a:lnRef>
+          <a:fillRef idx="3">
+            <a:schemeClr val="accent1"/>
+          </a:fillRef>
+          <a:effectRef idx="2">
+            <a:schemeClr val="accent1"/>
+          </a:effectRef>
+          <a:fontRef idx="minor">
+            <a:schemeClr val="lt1"/>
+          </a:fontRef>
+        </p:style>
+        <p:txBody>
+          <a:bodyPr rtlCol="0" anchor="ctr"/>
+          <a:lstStyle/>
+          <a:p>
+            <a:pPr algn="ctr"/>
+          </a:p>
+        </p:txBody>
+      </p:sp>
+      <p:sp>
+        <p:nvSpPr>
+          <p:cNvPr id="4" name="TextBox 3"/>
           <p:cNvSpPr txBox="1"/>
           <p:nvPr/>
         </p:nvSpPr>
         <p:spPr>
           <a:xfrm>
             <a:off x="640080" y="640080"/>
-            <a:ext cx="10911535" cy="502920"/>
+            <a:ext cx="6400800" cy="365760"/>
           </a:xfrm>
           <a:prstGeom prst="rect">
             <a:avLst/>
@@ -3168,7 +3212,7 @@
               </a:spcAft>
             </a:pPr>
             <a:r>
-              <a:rPr sz="1200" b="1">
+              <a:rPr sz="1300" b="1">
                 <a:solidFill>
                   <a:srgbClr val="B23A2A"/>
                 </a:solidFill>
@@ -3176,20 +3220,20 @@
                 <a:ea typeface="微软雅黑"/>
                 <a:cs typeface="微软雅黑"/>
               </a:rPr>
-              <a:t>化学 · 必修第一册 · 第1单元 物质及其变化</a:t>
-            </a:r>
-          </a:p>
-        </p:txBody>
-      </p:sp>
-      <p:sp>
-        <p:nvSpPr>
-          <p:cNvPr id="4" name="Rectangle 3"/>
+              <a:t>必修第一册 · 单元 1 · 高一</a:t>
+            </a:r>
+          </a:p>
+        </p:txBody>
+      </p:sp>
+      <p:sp>
+        <p:nvSpPr>
+          <p:cNvPr id="5" name="Rectangle 4"/>
           <p:cNvSpPr/>
           <p:nvPr/>
         </p:nvSpPr>
         <p:spPr>
           <a:xfrm>
-            <a:off x="640080" y="1207008"/>
+            <a:off x="640080" y="1097280"/>
             <a:ext cx="822960" cy="30480"/>
           </a:xfrm>
           <a:prstGeom prst="rect">
@@ -3227,14 +3271,51 @@
       </p:sp>
       <p:sp>
         <p:nvSpPr>
-          <p:cNvPr id="5" name="TextBox 4"/>
+          <p:cNvPr id="6" name="TextBox 5"/>
           <p:cNvSpPr txBox="1"/>
           <p:nvPr/>
         </p:nvSpPr>
         <p:spPr>
           <a:xfrm>
-            <a:off x="640080" y="1737360"/>
-            <a:ext cx="10911535" cy="2011680"/>
+            <a:off x="640080" y="1783080"/>
+            <a:ext cx="11247120" cy="548640"/>
+          </a:xfrm>
+          <a:prstGeom prst="rect">
+            <a:avLst/>
+          </a:prstGeom>
+          <a:noFill/>
+        </p:spPr>
+        <p:txBody>
+          <a:bodyPr wrap="square" anchor="t" lIns="0" rIns="0" tIns="0" bIns="0">
+            <a:spAutoFit/>
+          </a:bodyPr>
+          <a:lstStyle/>
+          <a:p>
+            <a:pPr algn="l"/>
+            <a:r>
+              <a:rPr sz="1800" b="1">
+                <a:solidFill>
+                  <a:srgbClr val="6B6258"/>
+                </a:solidFill>
+                <a:latin typeface="楷体"/>
+                <a:ea typeface="楷体"/>
+                <a:cs typeface="楷体"/>
+              </a:rPr>
+              <a:t>物质及其变化</a:t>
+            </a:r>
+          </a:p>
+        </p:txBody>
+      </p:sp>
+      <p:sp>
+        <p:nvSpPr>
+          <p:cNvPr id="7" name="TextBox 6"/>
+          <p:cNvSpPr txBox="1"/>
+          <p:nvPr/>
+        </p:nvSpPr>
+        <p:spPr>
+          <a:xfrm>
+            <a:off x="640080" y="2468880"/>
+            <a:ext cx="11247120" cy="1828800"/>
           </a:xfrm>
           <a:prstGeom prst="rect">
             <a:avLst/>
@@ -3268,57 +3349,20 @@
       </p:sp>
       <p:sp>
         <p:nvSpPr>
-          <p:cNvPr id="6" name="TextBox 5"/>
-          <p:cNvSpPr txBox="1"/>
-          <p:nvPr/>
-        </p:nvSpPr>
-        <p:spPr>
-          <a:xfrm>
-            <a:off x="640080" y="3840480"/>
-            <a:ext cx="10911535" cy="457200"/>
-          </a:xfrm>
-          <a:prstGeom prst="rect">
-            <a:avLst/>
-          </a:prstGeom>
-          <a:noFill/>
-        </p:spPr>
-        <p:txBody>
-          <a:bodyPr wrap="square" anchor="t" lIns="0" rIns="0" tIns="0" bIns="0">
-            <a:spAutoFit/>
-          </a:bodyPr>
-          <a:lstStyle/>
-          <a:p>
-            <a:pPr algn="l"/>
-            <a:r>
-              <a:rPr sz="1700" b="1">
-                <a:solidFill>
-                  <a:srgbClr val="B23A2A"/>
-                </a:solidFill>
-                <a:latin typeface="微软雅黑"/>
-                <a:ea typeface="微软雅黑"/>
-                <a:cs typeface="微软雅黑"/>
-              </a:rPr>
-              <a:t>新课  ·  第1课时  ·  45分钟</a:t>
-            </a:r>
-          </a:p>
-        </p:txBody>
-      </p:sp>
-      <p:sp>
-        <p:nvSpPr>
-          <p:cNvPr id="7" name="Rectangle 6"/>
+          <p:cNvPr id="8" name="Rectangle 7"/>
           <p:cNvSpPr/>
           <p:nvPr/>
         </p:nvSpPr>
         <p:spPr>
           <a:xfrm>
-            <a:off x="640080" y="5394960"/>
-            <a:ext cx="2011680" cy="33020"/>
+            <a:off x="640080" y="4343400"/>
+            <a:ext cx="1828800" cy="30480"/>
           </a:xfrm>
           <a:prstGeom prst="rect">
             <a:avLst/>
           </a:prstGeom>
           <a:solidFill>
-            <a:srgbClr val="C8A86B"/>
+            <a:srgbClr val="B23A2A"/>
           </a:solidFill>
           <a:ln>
             <a:noFill/>
@@ -3349,14 +3393,14 @@
       </p:sp>
       <p:sp>
         <p:nvSpPr>
-          <p:cNvPr id="8" name="TextBox 7"/>
+          <p:cNvPr id="9" name="TextBox 8"/>
           <p:cNvSpPr txBox="1"/>
           <p:nvPr/>
         </p:nvSpPr>
         <p:spPr>
           <a:xfrm>
-            <a:off x="640080" y="5623560"/>
-            <a:ext cx="10911535" cy="548640"/>
+            <a:off x="640080" y="4572000"/>
+            <a:ext cx="10789920" cy="1097280"/>
           </a:xfrm>
           <a:prstGeom prst="rect">
             <a:avLst/>
@@ -3369,9 +3413,50 @@
           </a:bodyPr>
           <a:lstStyle/>
           <a:p>
-            <a:pPr algn="l"/>
-            <a:r>
-              <a:rPr sz="1400" b="0">
+            <a:pPr algn="l">
+              <a:lnSpc>
+                <a:spcPct val="150000"/>
+              </a:lnSpc>
+            </a:pPr>
+            <a:r>
+              <a:rPr sz="1500" b="0">
+                <a:solidFill>
+                  <a:srgbClr val="1C2A33"/>
+                </a:solidFill>
+                <a:latin typeface="楷体"/>
+                <a:ea typeface="楷体"/>
+                <a:cs typeface="楷体"/>
+              </a:rPr>
+              <a:t>在初中混合物/纯净物、单质/化合物基础上，建立"交叉分类法"与"树状分类法"两种分类思路，并引入分散系（溶液、胶体、浊液），以丁</a:t>
+            </a:r>
+          </a:p>
+        </p:txBody>
+      </p:sp>
+      <p:sp>
+        <p:nvSpPr>
+          <p:cNvPr id="10" name="TextBox 9"/>
+          <p:cNvSpPr txBox="1"/>
+          <p:nvPr/>
+        </p:nvSpPr>
+        <p:spPr>
+          <a:xfrm>
+            <a:off x="640080" y="6400800"/>
+            <a:ext cx="10911535" cy="365760"/>
+          </a:xfrm>
+          <a:prstGeom prst="rect">
+            <a:avLst/>
+          </a:prstGeom>
+          <a:noFill/>
+        </p:spPr>
+        <p:txBody>
+          <a:bodyPr wrap="square" anchor="t" lIns="0" rIns="0" tIns="0" bIns="0">
+            <a:spAutoFit/>
+          </a:bodyPr>
+          <a:lstStyle/>
+          <a:p>
+            <a:pPr algn="ctr"/>
+            <a:r>
+              <a:rPr sz="1100" b="0">
                 <a:solidFill>
                   <a:srgbClr val="6B6258"/>
                 </a:solidFill>
@@ -3379,14 +3464,14 @@
                 <a:ea typeface="微软雅黑"/>
                 <a:cs typeface="微软雅黑"/>
               </a:rPr>
-              <a:t>学习任务群：    |    年级：高一</a:t>
-            </a:r>
-          </a:p>
-        </p:txBody>
-      </p:sp>
-      <p:sp>
-        <p:nvSpPr>
-          <p:cNvPr id="9" name="TextBox 8"/>
+              <a:t>本课件未使用无关配图，以学科配色块呈现</a:t>
+            </a:r>
+          </a:p>
+        </p:txBody>
+      </p:sp>
+      <p:sp>
+        <p:nvSpPr>
+          <p:cNvPr id="11" name="TextBox 10"/>
           <p:cNvSpPr txBox="1"/>
           <p:nvPr/>
         </p:nvSpPr>
@@ -3519,7 +3604,7 @@
                 <a:ea typeface="微软雅黑"/>
                 <a:cs typeface="微软雅黑"/>
               </a:rPr>
-              <a:t>学习目标</a:t>
+              <a:t>本课目标</a:t>
             </a:r>
           </a:p>
         </p:txBody>
@@ -3570,14 +3655,51 @@
       </p:sp>
       <p:sp>
         <p:nvSpPr>
-          <p:cNvPr id="5" name="Rounded Rectangle 4"/>
+          <p:cNvPr id="5" name="TextBox 4"/>
+          <p:cNvSpPr txBox="1"/>
+          <p:nvPr/>
+        </p:nvSpPr>
+        <p:spPr>
+          <a:xfrm>
+            <a:off x="640080" y="1325880"/>
+            <a:ext cx="10058400" cy="548640"/>
+          </a:xfrm>
+          <a:prstGeom prst="rect">
+            <a:avLst/>
+          </a:prstGeom>
+          <a:noFill/>
+        </p:spPr>
+        <p:txBody>
+          <a:bodyPr wrap="square" anchor="t" lIns="0" rIns="0" tIns="0" bIns="0">
+            <a:spAutoFit/>
+          </a:bodyPr>
+          <a:lstStyle/>
+          <a:p>
+            <a:pPr algn="l"/>
+            <a:r>
+              <a:rPr sz="3000" b="1">
+                <a:solidFill>
+                  <a:srgbClr val="1C2A33"/>
+                </a:solidFill>
+                <a:latin typeface="楷体"/>
+                <a:ea typeface="楷体"/>
+                <a:cs typeface="楷体"/>
+              </a:rPr>
+              <a:t>四向学习目标</a:t>
+            </a:r>
+          </a:p>
+        </p:txBody>
+      </p:sp>
+      <p:sp>
+        <p:nvSpPr>
+          <p:cNvPr id="6" name="Rounded Rectangle 5"/>
           <p:cNvSpPr/>
           <p:nvPr/>
         </p:nvSpPr>
         <p:spPr>
           <a:xfrm>
-            <a:off x="640080" y="1417320"/>
-            <a:ext cx="5349240" cy="2057400"/>
+            <a:off x="640080" y="2286000"/>
+            <a:ext cx="2487853" cy="3566160"/>
           </a:xfrm>
           <a:prstGeom prst="roundRect">
             <a:avLst/>
@@ -3585,7 +3707,7 @@
           <a:solidFill>
             <a:srgbClr val="FFFFFF"/>
           </a:solidFill>
-          <a:ln w="22860">
+          <a:ln w="20320">
             <a:solidFill>
               <a:srgbClr val="B23A2A"/>
             </a:solidFill>
@@ -3616,14 +3738,14 @@
       </p:sp>
       <p:sp>
         <p:nvSpPr>
-          <p:cNvPr id="6" name="Oval 5"/>
+          <p:cNvPr id="7" name="Oval 6"/>
           <p:cNvSpPr/>
           <p:nvPr/>
         </p:nvSpPr>
         <p:spPr>
           <a:xfrm>
-            <a:off x="804672" y="1581912"/>
-            <a:ext cx="457200" cy="457200"/>
+            <a:off x="868680" y="2542032"/>
+            <a:ext cx="502920" cy="502920"/>
           </a:xfrm>
           <a:prstGeom prst="ellipse">
             <a:avLst/>
@@ -3660,14 +3782,14 @@
       </p:sp>
       <p:sp>
         <p:nvSpPr>
-          <p:cNvPr id="7" name="TextBox 6"/>
+          <p:cNvPr id="8" name="TextBox 7"/>
           <p:cNvSpPr txBox="1"/>
           <p:nvPr/>
         </p:nvSpPr>
         <p:spPr>
           <a:xfrm>
-            <a:off x="804672" y="1636776"/>
-            <a:ext cx="457200" cy="384048"/>
+            <a:off x="868680" y="2596896"/>
+            <a:ext cx="502920" cy="402336"/>
           </a:xfrm>
           <a:prstGeom prst="rect">
             <a:avLst/>
@@ -3682,7 +3804,7 @@
           <a:p>
             <a:pPr algn="ctr"/>
             <a:r>
-              <a:rPr sz="1600" b="1">
+              <a:rPr sz="1800" b="1">
                 <a:solidFill>
                   <a:srgbClr val="FFFFFF"/>
                 </a:solidFill>
@@ -3697,14 +3819,14 @@
       </p:sp>
       <p:sp>
         <p:nvSpPr>
-          <p:cNvPr id="8" name="TextBox 7"/>
+          <p:cNvPr id="9" name="TextBox 8"/>
           <p:cNvSpPr txBox="1"/>
           <p:nvPr/>
         </p:nvSpPr>
         <p:spPr>
           <a:xfrm>
-            <a:off x="1371600" y="1527048"/>
-            <a:ext cx="4434840" cy="457200"/>
+            <a:off x="868680" y="3200400"/>
+            <a:ext cx="2030653" cy="457200"/>
           </a:xfrm>
           <a:prstGeom prst="rect">
             <a:avLst/>
@@ -3717,35 +3839,31 @@
           </a:bodyPr>
           <a:lstStyle/>
           <a:p>
-            <a:pPr algn="l">
-              <a:lnSpc>
-                <a:spcPct val="110000"/>
-              </a:lnSpc>
-            </a:pPr>
-            <a:r>
-              <a:rPr sz="1600" b="1">
-                <a:solidFill>
-                  <a:srgbClr val="1C2A33"/>
+            <a:pPr algn="l"/>
+            <a:r>
+              <a:rPr sz="1350" b="1">
+                <a:solidFill>
+                  <a:srgbClr val="B23A2A"/>
                 </a:solidFill>
                 <a:latin typeface="微软雅黑"/>
                 <a:ea typeface="微软雅黑"/>
                 <a:cs typeface="微软雅黑"/>
               </a:rPr>
-              <a:t>目标</a:t>
-            </a:r>
-          </a:p>
-        </p:txBody>
-      </p:sp>
-      <p:sp>
-        <p:nvSpPr>
-          <p:cNvPr id="9" name="TextBox 8"/>
+              <a:t>宏观辨识与微观探析</a:t>
+            </a:r>
+          </a:p>
+        </p:txBody>
+      </p:sp>
+      <p:sp>
+        <p:nvSpPr>
+          <p:cNvPr id="10" name="TextBox 9"/>
           <p:cNvSpPr txBox="1"/>
           <p:nvPr/>
         </p:nvSpPr>
         <p:spPr>
           <a:xfrm>
-            <a:off x="1371600" y="1965960"/>
-            <a:ext cx="4434840" cy="1417320"/>
+            <a:off x="896112" y="3703320"/>
+            <a:ext cx="1975789" cy="1920240"/>
           </a:xfrm>
           <a:prstGeom prst="rect">
             <a:avLst/>
@@ -3760,11 +3878,11 @@
           <a:p>
             <a:pPr algn="l">
               <a:lnSpc>
-                <a:spcPct val="128000"/>
+                <a:spcPct val="145000"/>
               </a:lnSpc>
             </a:pPr>
             <a:r>
-              <a:rPr sz="1400" b="0">
+              <a:rPr sz="1300" b="0">
                 <a:solidFill>
                   <a:srgbClr val="1C2A33"/>
                 </a:solidFill>
@@ -3779,14 +3897,14 @@
       </p:sp>
       <p:sp>
         <p:nvSpPr>
-          <p:cNvPr id="10" name="Rounded Rectangle 9"/>
+          <p:cNvPr id="11" name="Rounded Rectangle 10"/>
           <p:cNvSpPr/>
           <p:nvPr/>
         </p:nvSpPr>
         <p:spPr>
           <a:xfrm>
-            <a:off x="6263640" y="1417320"/>
-            <a:ext cx="5349240" cy="2057400"/>
+            <a:off x="3447973" y="2286000"/>
+            <a:ext cx="2487853" cy="3566160"/>
           </a:xfrm>
           <a:prstGeom prst="roundRect">
             <a:avLst/>
@@ -3794,9 +3912,9 @@
           <a:solidFill>
             <a:srgbClr val="FFFFFF"/>
           </a:solidFill>
-          <a:ln w="22860">
+          <a:ln w="20320">
             <a:solidFill>
-              <a:srgbClr val="B23A2A"/>
+              <a:srgbClr val="2E7D6B"/>
             </a:solidFill>
           </a:ln>
           <a:effectLst/>
@@ -3825,20 +3943,20 @@
       </p:sp>
       <p:sp>
         <p:nvSpPr>
-          <p:cNvPr id="11" name="Oval 10"/>
+          <p:cNvPr id="12" name="Oval 11"/>
           <p:cNvSpPr/>
           <p:nvPr/>
         </p:nvSpPr>
         <p:spPr>
           <a:xfrm>
-            <a:off x="6428232" y="1581912"/>
-            <a:ext cx="457200" cy="457200"/>
+            <a:off x="3676573" y="2542032"/>
+            <a:ext cx="502920" cy="502920"/>
           </a:xfrm>
           <a:prstGeom prst="ellipse">
             <a:avLst/>
           </a:prstGeom>
           <a:solidFill>
-            <a:srgbClr val="B23A2A"/>
+            <a:srgbClr val="2E7D6B"/>
           </a:solidFill>
           <a:ln>
             <a:noFill/>
@@ -3869,14 +3987,14 @@
       </p:sp>
       <p:sp>
         <p:nvSpPr>
-          <p:cNvPr id="12" name="TextBox 11"/>
+          <p:cNvPr id="13" name="TextBox 12"/>
           <p:cNvSpPr txBox="1"/>
           <p:nvPr/>
         </p:nvSpPr>
         <p:spPr>
           <a:xfrm>
-            <a:off x="6428232" y="1636776"/>
-            <a:ext cx="457200" cy="384048"/>
+            <a:off x="3676573" y="2596896"/>
+            <a:ext cx="502920" cy="402336"/>
           </a:xfrm>
           <a:prstGeom prst="rect">
             <a:avLst/>
@@ -3891,7 +4009,7 @@
           <a:p>
             <a:pPr algn="ctr"/>
             <a:r>
-              <a:rPr sz="1600" b="1">
+              <a:rPr sz="1800" b="1">
                 <a:solidFill>
                   <a:srgbClr val="FFFFFF"/>
                 </a:solidFill>
@@ -3906,14 +4024,14 @@
       </p:sp>
       <p:sp>
         <p:nvSpPr>
-          <p:cNvPr id="13" name="TextBox 12"/>
+          <p:cNvPr id="14" name="TextBox 13"/>
           <p:cNvSpPr txBox="1"/>
           <p:nvPr/>
         </p:nvSpPr>
         <p:spPr>
           <a:xfrm>
-            <a:off x="6995160" y="1527048"/>
-            <a:ext cx="4434840" cy="457200"/>
+            <a:off x="3676573" y="3200400"/>
+            <a:ext cx="2030653" cy="457200"/>
           </a:xfrm>
           <a:prstGeom prst="rect">
             <a:avLst/>
@@ -3926,35 +4044,31 @@
           </a:bodyPr>
           <a:lstStyle/>
           <a:p>
-            <a:pPr algn="l">
-              <a:lnSpc>
-                <a:spcPct val="110000"/>
-              </a:lnSpc>
-            </a:pPr>
-            <a:r>
-              <a:rPr sz="1600" b="1">
-                <a:solidFill>
-                  <a:srgbClr val="1C2A33"/>
+            <a:pPr algn="l"/>
+            <a:r>
+              <a:rPr sz="1350" b="1">
+                <a:solidFill>
+                  <a:srgbClr val="2E7D6B"/>
                 </a:solidFill>
                 <a:latin typeface="微软雅黑"/>
                 <a:ea typeface="微软雅黑"/>
                 <a:cs typeface="微软雅黑"/>
               </a:rPr>
-              <a:t>目标</a:t>
-            </a:r>
-          </a:p>
-        </p:txBody>
-      </p:sp>
-      <p:sp>
-        <p:nvSpPr>
-          <p:cNvPr id="14" name="TextBox 13"/>
+              <a:t>变化观念与平衡思想</a:t>
+            </a:r>
+          </a:p>
+        </p:txBody>
+      </p:sp>
+      <p:sp>
+        <p:nvSpPr>
+          <p:cNvPr id="15" name="TextBox 14"/>
           <p:cNvSpPr txBox="1"/>
           <p:nvPr/>
         </p:nvSpPr>
         <p:spPr>
           <a:xfrm>
-            <a:off x="6995160" y="1965960"/>
-            <a:ext cx="4434840" cy="1417320"/>
+            <a:off x="3704005" y="3703320"/>
+            <a:ext cx="1975789" cy="1920240"/>
           </a:xfrm>
           <a:prstGeom prst="rect">
             <a:avLst/>
@@ -3969,11 +4083,11 @@
           <a:p>
             <a:pPr algn="l">
               <a:lnSpc>
-                <a:spcPct val="128000"/>
+                <a:spcPct val="145000"/>
               </a:lnSpc>
             </a:pPr>
             <a:r>
-              <a:rPr sz="1400" b="0">
+              <a:rPr sz="1300" b="0">
                 <a:solidFill>
                   <a:srgbClr val="1C2A33"/>
                 </a:solidFill>
@@ -3988,14 +4102,14 @@
       </p:sp>
       <p:sp>
         <p:nvSpPr>
-          <p:cNvPr id="15" name="Rounded Rectangle 14"/>
+          <p:cNvPr id="16" name="Rounded Rectangle 15"/>
           <p:cNvSpPr/>
           <p:nvPr/>
         </p:nvSpPr>
         <p:spPr>
           <a:xfrm>
-            <a:off x="640080" y="3703320"/>
-            <a:ext cx="5349240" cy="2057400"/>
+            <a:off x="6255867" y="2286000"/>
+            <a:ext cx="2487853" cy="3566160"/>
           </a:xfrm>
           <a:prstGeom prst="roundRect">
             <a:avLst/>
@@ -4003,9 +4117,9 @@
           <a:solidFill>
             <a:srgbClr val="FFFFFF"/>
           </a:solidFill>
-          <a:ln w="22860">
+          <a:ln w="20320">
             <a:solidFill>
-              <a:srgbClr val="B23A2A"/>
+              <a:srgbClr val="C8A86B"/>
             </a:solidFill>
           </a:ln>
           <a:effectLst/>
@@ -4034,20 +4148,20 @@
       </p:sp>
       <p:sp>
         <p:nvSpPr>
-          <p:cNvPr id="16" name="Oval 15"/>
+          <p:cNvPr id="17" name="Oval 16"/>
           <p:cNvSpPr/>
           <p:nvPr/>
         </p:nvSpPr>
         <p:spPr>
           <a:xfrm>
-            <a:off x="804672" y="3867912"/>
-            <a:ext cx="457200" cy="457200"/>
+            <a:off x="6484467" y="2542032"/>
+            <a:ext cx="502920" cy="502920"/>
           </a:xfrm>
           <a:prstGeom prst="ellipse">
             <a:avLst/>
           </a:prstGeom>
           <a:solidFill>
-            <a:srgbClr val="B23A2A"/>
+            <a:srgbClr val="C8A86B"/>
           </a:solidFill>
           <a:ln>
             <a:noFill/>
@@ -4078,14 +4192,14 @@
       </p:sp>
       <p:sp>
         <p:nvSpPr>
-          <p:cNvPr id="17" name="TextBox 16"/>
+          <p:cNvPr id="18" name="TextBox 17"/>
           <p:cNvSpPr txBox="1"/>
           <p:nvPr/>
         </p:nvSpPr>
         <p:spPr>
           <a:xfrm>
-            <a:off x="804672" y="3922776"/>
-            <a:ext cx="457200" cy="384048"/>
+            <a:off x="6484467" y="2596896"/>
+            <a:ext cx="502920" cy="402336"/>
           </a:xfrm>
           <a:prstGeom prst="rect">
             <a:avLst/>
@@ -4100,7 +4214,7 @@
           <a:p>
             <a:pPr algn="ctr"/>
             <a:r>
-              <a:rPr sz="1600" b="1">
+              <a:rPr sz="1800" b="1">
                 <a:solidFill>
                   <a:srgbClr val="FFFFFF"/>
                 </a:solidFill>
@@ -4115,14 +4229,14 @@
       </p:sp>
       <p:sp>
         <p:nvSpPr>
-          <p:cNvPr id="18" name="TextBox 17"/>
+          <p:cNvPr id="19" name="TextBox 18"/>
           <p:cNvSpPr txBox="1"/>
           <p:nvPr/>
         </p:nvSpPr>
         <p:spPr>
           <a:xfrm>
-            <a:off x="1371600" y="3813048"/>
-            <a:ext cx="4434840" cy="457200"/>
+            <a:off x="6484467" y="3200400"/>
+            <a:ext cx="2030653" cy="457200"/>
           </a:xfrm>
           <a:prstGeom prst="rect">
             <a:avLst/>
@@ -4135,35 +4249,31 @@
           </a:bodyPr>
           <a:lstStyle/>
           <a:p>
-            <a:pPr algn="l">
-              <a:lnSpc>
-                <a:spcPct val="110000"/>
-              </a:lnSpc>
-            </a:pPr>
-            <a:r>
-              <a:rPr sz="1600" b="1">
-                <a:solidFill>
-                  <a:srgbClr val="1C2A33"/>
+            <a:pPr algn="l"/>
+            <a:r>
+              <a:rPr sz="1350" b="1">
+                <a:solidFill>
+                  <a:srgbClr val="C8A86B"/>
                 </a:solidFill>
                 <a:latin typeface="微软雅黑"/>
                 <a:ea typeface="微软雅黑"/>
                 <a:cs typeface="微软雅黑"/>
               </a:rPr>
-              <a:t>目标</a:t>
-            </a:r>
-          </a:p>
-        </p:txBody>
-      </p:sp>
-      <p:sp>
-        <p:nvSpPr>
-          <p:cNvPr id="19" name="TextBox 18"/>
+              <a:t>证据推理与模型认知</a:t>
+            </a:r>
+          </a:p>
+        </p:txBody>
+      </p:sp>
+      <p:sp>
+        <p:nvSpPr>
+          <p:cNvPr id="20" name="TextBox 19"/>
           <p:cNvSpPr txBox="1"/>
           <p:nvPr/>
         </p:nvSpPr>
         <p:spPr>
           <a:xfrm>
-            <a:off x="1371600" y="4251960"/>
-            <a:ext cx="4434840" cy="1417320"/>
+            <a:off x="6511899" y="3703320"/>
+            <a:ext cx="1975789" cy="1920240"/>
           </a:xfrm>
           <a:prstGeom prst="rect">
             <a:avLst/>
@@ -4178,11 +4288,11 @@
           <a:p>
             <a:pPr algn="l">
               <a:lnSpc>
-                <a:spcPct val="128000"/>
+                <a:spcPct val="145000"/>
               </a:lnSpc>
             </a:pPr>
             <a:r>
-              <a:rPr sz="1400" b="0">
+              <a:rPr sz="1300" b="0">
                 <a:solidFill>
                   <a:srgbClr val="1C2A33"/>
                 </a:solidFill>
@@ -4197,14 +4307,14 @@
       </p:sp>
       <p:sp>
         <p:nvSpPr>
-          <p:cNvPr id="20" name="Rounded Rectangle 19"/>
+          <p:cNvPr id="21" name="Rounded Rectangle 20"/>
           <p:cNvSpPr/>
           <p:nvPr/>
         </p:nvSpPr>
         <p:spPr>
           <a:xfrm>
-            <a:off x="6263640" y="3703320"/>
-            <a:ext cx="5349240" cy="2057400"/>
+            <a:off x="9063761" y="2286000"/>
+            <a:ext cx="2487853" cy="3566160"/>
           </a:xfrm>
           <a:prstGeom prst="roundRect">
             <a:avLst/>
@@ -4212,9 +4322,9 @@
           <a:solidFill>
             <a:srgbClr val="FFFFFF"/>
           </a:solidFill>
-          <a:ln w="22860">
+          <a:ln w="20320">
             <a:solidFill>
-              <a:srgbClr val="B23A2A"/>
+              <a:srgbClr val="6B6258"/>
             </a:solidFill>
           </a:ln>
           <a:effectLst/>
@@ -4243,20 +4353,20 @@
       </p:sp>
       <p:sp>
         <p:nvSpPr>
-          <p:cNvPr id="21" name="Oval 20"/>
+          <p:cNvPr id="22" name="Oval 21"/>
           <p:cNvSpPr/>
           <p:nvPr/>
         </p:nvSpPr>
         <p:spPr>
           <a:xfrm>
-            <a:off x="6428232" y="3867912"/>
-            <a:ext cx="457200" cy="457200"/>
+            <a:off x="9292361" y="2542032"/>
+            <a:ext cx="502920" cy="502920"/>
           </a:xfrm>
           <a:prstGeom prst="ellipse">
             <a:avLst/>
           </a:prstGeom>
           <a:solidFill>
-            <a:srgbClr val="B23A2A"/>
+            <a:srgbClr val="6B6258"/>
           </a:solidFill>
           <a:ln>
             <a:noFill/>
@@ -4287,14 +4397,14 @@
       </p:sp>
       <p:sp>
         <p:nvSpPr>
-          <p:cNvPr id="22" name="TextBox 21"/>
+          <p:cNvPr id="23" name="TextBox 22"/>
           <p:cNvSpPr txBox="1"/>
           <p:nvPr/>
         </p:nvSpPr>
         <p:spPr>
           <a:xfrm>
-            <a:off x="6428232" y="3922776"/>
-            <a:ext cx="457200" cy="384048"/>
+            <a:off x="9292361" y="2596896"/>
+            <a:ext cx="502920" cy="402336"/>
           </a:xfrm>
           <a:prstGeom prst="rect">
             <a:avLst/>
@@ -4309,7 +4419,7 @@
           <a:p>
             <a:pPr algn="ctr"/>
             <a:r>
-              <a:rPr sz="1600" b="1">
+              <a:rPr sz="1800" b="1">
                 <a:solidFill>
                   <a:srgbClr val="FFFFFF"/>
                 </a:solidFill>
@@ -4324,14 +4434,14 @@
       </p:sp>
       <p:sp>
         <p:nvSpPr>
-          <p:cNvPr id="23" name="TextBox 22"/>
+          <p:cNvPr id="24" name="TextBox 23"/>
           <p:cNvSpPr txBox="1"/>
           <p:nvPr/>
         </p:nvSpPr>
         <p:spPr>
           <a:xfrm>
-            <a:off x="6995160" y="3813048"/>
-            <a:ext cx="4434840" cy="457200"/>
+            <a:off x="9292361" y="3200400"/>
+            <a:ext cx="2030653" cy="457200"/>
           </a:xfrm>
           <a:prstGeom prst="rect">
             <a:avLst/>
@@ -4344,35 +4454,31 @@
           </a:bodyPr>
           <a:lstStyle/>
           <a:p>
-            <a:pPr algn="l">
-              <a:lnSpc>
-                <a:spcPct val="110000"/>
-              </a:lnSpc>
-            </a:pPr>
-            <a:r>
-              <a:rPr sz="1600" b="1">
-                <a:solidFill>
-                  <a:srgbClr val="1C2A33"/>
+            <a:pPr algn="l"/>
+            <a:r>
+              <a:rPr sz="1350" b="1">
+                <a:solidFill>
+                  <a:srgbClr val="6B6258"/>
                 </a:solidFill>
                 <a:latin typeface="微软雅黑"/>
                 <a:ea typeface="微软雅黑"/>
                 <a:cs typeface="微软雅黑"/>
               </a:rPr>
-              <a:t>目标</a:t>
-            </a:r>
-          </a:p>
-        </p:txBody>
-      </p:sp>
-      <p:sp>
-        <p:nvSpPr>
-          <p:cNvPr id="24" name="TextBox 23"/>
+              <a:t>科学探究与创新意识</a:t>
+            </a:r>
+          </a:p>
+        </p:txBody>
+      </p:sp>
+      <p:sp>
+        <p:nvSpPr>
+          <p:cNvPr id="25" name="TextBox 24"/>
           <p:cNvSpPr txBox="1"/>
           <p:nvPr/>
         </p:nvSpPr>
         <p:spPr>
           <a:xfrm>
-            <a:off x="6995160" y="4251960"/>
-            <a:ext cx="4434840" cy="1417320"/>
+            <a:off x="9319793" y="3703320"/>
+            <a:ext cx="1975789" cy="1920240"/>
           </a:xfrm>
           <a:prstGeom prst="rect">
             <a:avLst/>
@@ -4387,11 +4493,11 @@
           <a:p>
             <a:pPr algn="l">
               <a:lnSpc>
-                <a:spcPct val="128000"/>
+                <a:spcPct val="145000"/>
               </a:lnSpc>
             </a:pPr>
             <a:r>
-              <a:rPr sz="1400" b="0">
+              <a:rPr sz="1300" b="0">
                 <a:solidFill>
                   <a:srgbClr val="1C2A33"/>
                 </a:solidFill>
@@ -4406,7 +4512,7 @@
       </p:sp>
       <p:sp>
         <p:nvSpPr>
-          <p:cNvPr id="25" name="TextBox 24"/>
+          <p:cNvPr id="26" name="TextBox 25"/>
           <p:cNvSpPr txBox="1"/>
           <p:nvPr/>
         </p:nvSpPr>
@@ -4533,13 +4639,13 @@
             <a:r>
               <a:rPr sz="1300" b="1">
                 <a:solidFill>
-                  <a:srgbClr val="2E7D6B"/>
+                  <a:srgbClr val="B23A2A"/>
                 </a:solidFill>
                 <a:latin typeface="微软雅黑"/>
                 <a:ea typeface="微软雅黑"/>
                 <a:cs typeface="微软雅黑"/>
               </a:rPr>
-              <a:t>课文背景</a:t>
+              <a:t>背景与权威调研</a:t>
             </a:r>
           </a:p>
         </p:txBody>
@@ -4559,7 +4665,7 @@
             <a:avLst/>
           </a:prstGeom>
           <a:solidFill>
-            <a:srgbClr val="2E7D6B"/>
+            <a:srgbClr val="B23A2A"/>
           </a:solidFill>
           <a:ln>
             <a:noFill/>
@@ -4596,8 +4702,253 @@
         </p:nvSpPr>
         <p:spPr>
           <a:xfrm>
-            <a:off x="640080" y="1508760"/>
-            <a:ext cx="6766560" cy="4572000"/>
+            <a:off x="640080" y="1325880"/>
+            <a:ext cx="10058400" cy="548640"/>
+          </a:xfrm>
+          <a:prstGeom prst="rect">
+            <a:avLst/>
+          </a:prstGeom>
+          <a:noFill/>
+        </p:spPr>
+        <p:txBody>
+          <a:bodyPr wrap="square" anchor="t" lIns="0" rIns="0" tIns="0" bIns="0">
+            <a:spAutoFit/>
+          </a:bodyPr>
+          <a:lstStyle/>
+          <a:p>
+            <a:pPr algn="l"/>
+            <a:r>
+              <a:rPr sz="2800" b="1">
+                <a:solidFill>
+                  <a:srgbClr val="1C2A33"/>
+                </a:solidFill>
+                <a:latin typeface="楷体"/>
+                <a:ea typeface="楷体"/>
+                <a:cs typeface="楷体"/>
+              </a:rPr>
+              <a:t>教材定位与史实来源</a:t>
+            </a:r>
+          </a:p>
+        </p:txBody>
+      </p:sp>
+      <p:sp>
+        <p:nvSpPr>
+          <p:cNvPr id="6" name="Rounded Rectangle 5"/>
+          <p:cNvSpPr/>
+          <p:nvPr/>
+        </p:nvSpPr>
+        <p:spPr>
+          <a:xfrm>
+            <a:off x="640080" y="2011680"/>
+            <a:ext cx="5227167" cy="4480560"/>
+          </a:xfrm>
+          <a:prstGeom prst="roundRect">
+            <a:avLst/>
+          </a:prstGeom>
+          <a:solidFill>
+            <a:srgbClr val="1C2A33"/>
+          </a:solidFill>
+          <a:ln>
+            <a:noFill/>
+          </a:ln>
+          <a:effectLst/>
+        </p:spPr>
+        <p:style>
+          <a:lnRef idx="1">
+            <a:schemeClr val="accent1"/>
+          </a:lnRef>
+          <a:fillRef idx="3">
+            <a:schemeClr val="accent1"/>
+          </a:fillRef>
+          <a:effectRef idx="2">
+            <a:schemeClr val="accent1"/>
+          </a:effectRef>
+          <a:fontRef idx="minor">
+            <a:schemeClr val="lt1"/>
+          </a:fontRef>
+        </p:style>
+        <p:txBody>
+          <a:bodyPr rtlCol="0" anchor="ctr"/>
+          <a:lstStyle/>
+          <a:p>
+            <a:pPr algn="ctr"/>
+          </a:p>
+        </p:txBody>
+      </p:sp>
+      <p:sp>
+        <p:nvSpPr>
+          <p:cNvPr id="7" name="TextBox 6"/>
+          <p:cNvSpPr txBox="1"/>
+          <p:nvPr/>
+        </p:nvSpPr>
+        <p:spPr>
+          <a:xfrm>
+            <a:off x="914400" y="2194560"/>
+            <a:ext cx="4678527" cy="457200"/>
+          </a:xfrm>
+          <a:prstGeom prst="rect">
+            <a:avLst/>
+          </a:prstGeom>
+          <a:noFill/>
+        </p:spPr>
+        <p:txBody>
+          <a:bodyPr wrap="square" anchor="t" lIns="0" rIns="0" tIns="0" bIns="0">
+            <a:spAutoFit/>
+          </a:bodyPr>
+          <a:lstStyle/>
+          <a:p>
+            <a:pPr algn="l"/>
+            <a:r>
+              <a:rPr sz="1700" b="1">
+                <a:solidFill>
+                  <a:srgbClr val="C8A86B"/>
+                </a:solidFill>
+                <a:latin typeface="楷体"/>
+                <a:ea typeface="楷体"/>
+                <a:cs typeface="楷体"/>
+              </a:rPr>
+              <a:t>教材定位</a:t>
+            </a:r>
+          </a:p>
+        </p:txBody>
+      </p:sp>
+      <p:sp>
+        <p:nvSpPr>
+          <p:cNvPr id="8" name="TextBox 7"/>
+          <p:cNvSpPr txBox="1"/>
+          <p:nvPr/>
+        </p:nvSpPr>
+        <p:spPr>
+          <a:xfrm>
+            <a:off x="914400" y="2743200"/>
+            <a:ext cx="4678527" cy="3566160"/>
+          </a:xfrm>
+          <a:prstGeom prst="rect">
+            <a:avLst/>
+          </a:prstGeom>
+          <a:noFill/>
+        </p:spPr>
+        <p:txBody>
+          <a:bodyPr wrap="square" anchor="t" lIns="0" rIns="0" tIns="0" bIns="0">
+            <a:spAutoFit/>
+          </a:bodyPr>
+          <a:lstStyle/>
+          <a:p>
+            <a:pPr algn="l">
+              <a:lnSpc>
+                <a:spcPct val="155000"/>
+              </a:lnSpc>
+              <a:spcAft>
+                <a:spcPts val="600"/>
+              </a:spcAft>
+            </a:pPr>
+            <a:r>
+              <a:rPr sz="1400" b="0">
+                <a:solidFill>
+                  <a:srgbClr val="FFFFFF"/>
+                </a:solidFill>
+                <a:latin typeface="楷体"/>
+                <a:ea typeface="楷体"/>
+                <a:cs typeface="楷体"/>
+              </a:rPr>
+              <a:t>在初中混合物/纯净物、单质/化合物基础上，建立"交叉分类法"与"树状分类法"两种分类思路，并引入分散系（溶液、胶体、浊液），以丁达尔效应区分胶体。分类是化学研究的重要方法，为后续离子反应、氧化还原建立认知框架。</a:t>
+            </a:r>
+          </a:p>
+        </p:txBody>
+      </p:sp>
+      <p:sp>
+        <p:nvSpPr>
+          <p:cNvPr id="9" name="Rounded Rectangle 8"/>
+          <p:cNvSpPr/>
+          <p:nvPr/>
+        </p:nvSpPr>
+        <p:spPr>
+          <a:xfrm>
+            <a:off x="6324447" y="2011680"/>
+            <a:ext cx="5227167" cy="4480560"/>
+          </a:xfrm>
+          <a:prstGeom prst="roundRect">
+            <a:avLst/>
+          </a:prstGeom>
+          <a:solidFill>
+            <a:srgbClr val="FFFFFF"/>
+          </a:solidFill>
+          <a:ln w="20320">
+            <a:solidFill>
+              <a:srgbClr val="B23A2A"/>
+            </a:solidFill>
+          </a:ln>
+          <a:effectLst/>
+        </p:spPr>
+        <p:style>
+          <a:lnRef idx="1">
+            <a:schemeClr val="accent1"/>
+          </a:lnRef>
+          <a:fillRef idx="3">
+            <a:schemeClr val="accent1"/>
+          </a:fillRef>
+          <a:effectRef idx="2">
+            <a:schemeClr val="accent1"/>
+          </a:effectRef>
+          <a:fontRef idx="minor">
+            <a:schemeClr val="lt1"/>
+          </a:fontRef>
+        </p:style>
+        <p:txBody>
+          <a:bodyPr rtlCol="0" anchor="ctr"/>
+          <a:lstStyle/>
+          <a:p>
+            <a:pPr algn="ctr"/>
+          </a:p>
+        </p:txBody>
+      </p:sp>
+      <p:sp>
+        <p:nvSpPr>
+          <p:cNvPr id="10" name="TextBox 9"/>
+          <p:cNvSpPr txBox="1"/>
+          <p:nvPr/>
+        </p:nvSpPr>
+        <p:spPr>
+          <a:xfrm>
+            <a:off x="6598767" y="2194560"/>
+            <a:ext cx="4678527" cy="457200"/>
+          </a:xfrm>
+          <a:prstGeom prst="rect">
+            <a:avLst/>
+          </a:prstGeom>
+          <a:noFill/>
+        </p:spPr>
+        <p:txBody>
+          <a:bodyPr wrap="square" anchor="t" lIns="0" rIns="0" tIns="0" bIns="0">
+            <a:spAutoFit/>
+          </a:bodyPr>
+          <a:lstStyle/>
+          <a:p>
+            <a:pPr algn="l"/>
+            <a:r>
+              <a:rPr sz="1600" b="1">
+                <a:solidFill>
+                  <a:srgbClr val="B23A2A"/>
+                </a:solidFill>
+                <a:latin typeface="楷体"/>
+                <a:ea typeface="楷体"/>
+                <a:cs typeface="楷体"/>
+              </a:rPr>
+              <a:t>权威来源（已联网核实）</a:t>
+            </a:r>
+          </a:p>
+        </p:txBody>
+      </p:sp>
+      <p:sp>
+        <p:nvSpPr>
+          <p:cNvPr id="11" name="TextBox 10"/>
+          <p:cNvSpPr txBox="1"/>
+          <p:nvPr/>
+        </p:nvSpPr>
+        <p:spPr>
+          <a:xfrm>
+            <a:off x="6598767" y="2743200"/>
+            <a:ext cx="4678527" cy="3566160"/>
           </a:xfrm>
           <a:prstGeom prst="rect">
             <a:avLst/>
@@ -4615,11 +4966,11 @@
                 <a:spcPct val="150000"/>
               </a:lnSpc>
               <a:spcAft>
-                <a:spcPts val="600"/>
+                <a:spcPts val="1000"/>
               </a:spcAft>
             </a:pPr>
             <a:r>
-              <a:rPr sz="1600" b="0">
+              <a:rPr sz="1250" b="0">
                 <a:solidFill>
                   <a:srgbClr val="1C2A33"/>
                 </a:solidFill>
@@ -4627,46 +4978,42 @@
                 <a:ea typeface="楷体"/>
                 <a:cs typeface="楷体"/>
               </a:rPr>
-              <a:t>在初中混合物/纯净物、单质/化合物基础上，建立"交叉分类法"与"树状分类法"两种分类思路，并引入分散系（溶液、胶体、浊液），以丁达尔效应区分胶体。分类是化学研究的重要方法，为后续离子反应、氧化还原建立认知框架。</a:t>
-            </a:r>
-          </a:p>
-        </p:txBody>
-      </p:sp>
-      <p:pic>
-        <p:nvPicPr>
-          <p:cNvPr id="6" name="Picture 5" descr="craft.jpg"/>
-          <p:cNvPicPr>
-            <a:picLocks noChangeAspect="1"/>
-          </p:cNvPicPr>
-          <p:nvPr/>
-        </p:nvPicPr>
-        <p:blipFill>
-          <a:blip r:embed="rId2"/>
-          <a:srcRect l="368" r="368"/>
-          <a:stretch>
-            <a:fillRect/>
-          </a:stretch>
-        </p:blipFill>
-        <p:spPr>
-          <a:xfrm>
-            <a:off x="8046720" y="1508760"/>
-            <a:ext cx="4114800" cy="3108960"/>
-          </a:xfrm>
-          <a:prstGeom prst="rect">
-            <a:avLst/>
-          </a:prstGeom>
-        </p:spPr>
-      </p:pic>
-      <p:sp>
-        <p:nvSpPr>
-          <p:cNvPr id="7" name="TextBox 6"/>
+              <a:t>1. 胶体与丁达尔效应：英国物理学家约翰·丁达尔(John Tyndall)于1869年发现并命名；胶体粒子直径约1–100 nm，小于可见光波长(400–760 nm)，对光散射形成光亮通路，可用于区分溶液与胶体（Britannica / 维基百科）。</a:t>
+            </a:r>
+          </a:p>
+          <a:p>
+            <a:pPr algn="l">
+              <a:lnSpc>
+                <a:spcPct val="150000"/>
+              </a:lnSpc>
+              <a:spcAft>
+                <a:spcPts val="1000"/>
+              </a:spcAft>
+            </a:pPr>
+            <a:r>
+              <a:rPr sz="1250" b="0">
+                <a:solidFill>
+                  <a:srgbClr val="1C2A33"/>
+                </a:solidFill>
+                <a:latin typeface="楷体"/>
+                <a:ea typeface="楷体"/>
+                <a:cs typeface="楷体"/>
+              </a:rPr>
+              <a:t>2. 分类是化学研究的基本方法：初中已建立混合物/纯净物、单质/化合物框架，高中引入交叉分类与树状分类，并为离子反应、氧化还原反应建立认知基础（人教版必修第一册）。</a:t>
+            </a:r>
+          </a:p>
+        </p:txBody>
+      </p:sp>
+      <p:sp>
+        <p:nvSpPr>
+          <p:cNvPr id="12" name="TextBox 11"/>
           <p:cNvSpPr txBox="1"/>
           <p:nvPr/>
         </p:nvSpPr>
         <p:spPr>
           <a:xfrm>
-            <a:off x="8046720" y="4663440"/>
-            <a:ext cx="4114800" cy="365760"/>
+            <a:off x="640080" y="6400800"/>
+            <a:ext cx="10911535" cy="365760"/>
           </a:xfrm>
           <a:prstGeom prst="rect">
             <a:avLst/>
@@ -4689,14 +5036,14 @@
                 <a:ea typeface="微软雅黑"/>
                 <a:cs typeface="微软雅黑"/>
               </a:rPr>
-              <a:t>资料图（自由授权，复用 craft.jpg）</a:t>
-            </a:r>
-          </a:p>
-        </p:txBody>
-      </p:sp>
-      <p:sp>
-        <p:nvSpPr>
-          <p:cNvPr id="8" name="TextBox 7"/>
+              <a:t>本课件未使用无关配图，以学科配色块呈现</a:t>
+            </a:r>
+          </a:p>
+        </p:txBody>
+      </p:sp>
+      <p:sp>
+        <p:nvSpPr>
+          <p:cNvPr id="13" name="TextBox 12"/>
           <p:cNvSpPr txBox="1"/>
           <p:nvPr/>
         </p:nvSpPr>
@@ -4829,7 +5176,7 @@
                 <a:ea typeface="微软雅黑"/>
                 <a:cs typeface="微软雅黑"/>
               </a:rPr>
-              <a:t>学习重点</a:t>
+              <a:t>重点</a:t>
             </a:r>
           </a:p>
         </p:txBody>
@@ -4880,14 +5227,51 @@
       </p:sp>
       <p:sp>
         <p:nvSpPr>
-          <p:cNvPr id="5" name="Rounded Rectangle 4"/>
+          <p:cNvPr id="5" name="TextBox 4"/>
+          <p:cNvSpPr txBox="1"/>
+          <p:nvPr/>
+        </p:nvSpPr>
+        <p:spPr>
+          <a:xfrm>
+            <a:off x="640080" y="1325880"/>
+            <a:ext cx="10515600" cy="548640"/>
+          </a:xfrm>
+          <a:prstGeom prst="rect">
+            <a:avLst/>
+          </a:prstGeom>
+          <a:noFill/>
+        </p:spPr>
+        <p:txBody>
+          <a:bodyPr wrap="square" anchor="t" lIns="0" rIns="0" tIns="0" bIns="0">
+            <a:spAutoFit/>
+          </a:bodyPr>
+          <a:lstStyle/>
+          <a:p>
+            <a:pPr algn="l"/>
+            <a:r>
+              <a:rPr sz="2800" b="1">
+                <a:solidFill>
+                  <a:srgbClr val="1C2A33"/>
+                </a:solidFill>
+                <a:latin typeface="楷体"/>
+                <a:ea typeface="楷体"/>
+                <a:cs typeface="楷体"/>
+              </a:rPr>
+              <a:t>本课核心知识</a:t>
+            </a:r>
+          </a:p>
+        </p:txBody>
+      </p:sp>
+      <p:sp>
+        <p:nvSpPr>
+          <p:cNvPr id="6" name="Rounded Rectangle 5"/>
           <p:cNvSpPr/>
           <p:nvPr/>
         </p:nvSpPr>
         <p:spPr>
           <a:xfrm>
-            <a:off x="640080" y="1371600"/>
-            <a:ext cx="10911535" cy="1170432"/>
+            <a:off x="640080" y="2194560"/>
+            <a:ext cx="2487853" cy="4023360"/>
           </a:xfrm>
           <a:prstGeom prst="roundRect">
             <a:avLst/>
@@ -4895,7 +5279,343 @@
           <a:solidFill>
             <a:srgbClr val="FFFFFF"/>
           </a:solidFill>
-          <a:ln w="22860">
+          <a:ln w="20320">
+            <a:solidFill>
+              <a:srgbClr val="B23A2A"/>
+            </a:solidFill>
+          </a:ln>
+          <a:effectLst/>
+        </p:spPr>
+        <p:style>
+          <a:lnRef idx="1">
+            <a:schemeClr val="accent1"/>
+          </a:lnRef>
+          <a:fillRef idx="3">
+            <a:schemeClr val="accent1"/>
+          </a:fillRef>
+          <a:effectRef idx="2">
+            <a:schemeClr val="accent1"/>
+          </a:effectRef>
+          <a:fontRef idx="minor">
+            <a:schemeClr val="lt1"/>
+          </a:fontRef>
+        </p:style>
+        <p:txBody>
+          <a:bodyPr rtlCol="0" anchor="ctr"/>
+          <a:lstStyle/>
+          <a:p>
+            <a:pPr algn="ctr"/>
+          </a:p>
+        </p:txBody>
+      </p:sp>
+      <p:sp>
+        <p:nvSpPr>
+          <p:cNvPr id="7" name="Rectangle 6"/>
+          <p:cNvSpPr/>
+          <p:nvPr/>
+        </p:nvSpPr>
+        <p:spPr>
+          <a:xfrm>
+            <a:off x="640080" y="2194560"/>
+            <a:ext cx="2487853" cy="566928"/>
+          </a:xfrm>
+          <a:prstGeom prst="rect">
+            <a:avLst/>
+          </a:prstGeom>
+          <a:solidFill>
+            <a:srgbClr val="B23A2A"/>
+          </a:solidFill>
+          <a:ln>
+            <a:noFill/>
+          </a:ln>
+          <a:effectLst/>
+        </p:spPr>
+        <p:style>
+          <a:lnRef idx="1">
+            <a:schemeClr val="accent1"/>
+          </a:lnRef>
+          <a:fillRef idx="3">
+            <a:schemeClr val="accent1"/>
+          </a:fillRef>
+          <a:effectRef idx="2">
+            <a:schemeClr val="accent1"/>
+          </a:effectRef>
+          <a:fontRef idx="minor">
+            <a:schemeClr val="lt1"/>
+          </a:fontRef>
+        </p:style>
+        <p:txBody>
+          <a:bodyPr rtlCol="0" anchor="ctr"/>
+          <a:lstStyle/>
+          <a:p>
+            <a:pPr algn="ctr"/>
+          </a:p>
+        </p:txBody>
+      </p:sp>
+      <p:sp>
+        <p:nvSpPr>
+          <p:cNvPr id="8" name="TextBox 7"/>
+          <p:cNvSpPr txBox="1"/>
+          <p:nvPr/>
+        </p:nvSpPr>
+        <p:spPr>
+          <a:xfrm>
+            <a:off x="640080" y="2313432"/>
+            <a:ext cx="2487853" cy="365760"/>
+          </a:xfrm>
+          <a:prstGeom prst="rect">
+            <a:avLst/>
+          </a:prstGeom>
+          <a:noFill/>
+        </p:spPr>
+        <p:txBody>
+          <a:bodyPr wrap="square" anchor="t" lIns="0" rIns="0" tIns="0" bIns="0">
+            <a:spAutoFit/>
+          </a:bodyPr>
+          <a:lstStyle/>
+          <a:p>
+            <a:pPr algn="ctr"/>
+            <a:r>
+              <a:rPr sz="1500" b="1">
+                <a:solidFill>
+                  <a:srgbClr val="FFFFFF"/>
+                </a:solidFill>
+                <a:latin typeface="微软雅黑"/>
+                <a:ea typeface="微软雅黑"/>
+                <a:cs typeface="微软雅黑"/>
+              </a:rPr>
+              <a:t>重点 1</a:t>
+            </a:r>
+          </a:p>
+        </p:txBody>
+      </p:sp>
+      <p:sp>
+        <p:nvSpPr>
+          <p:cNvPr id="9" name="TextBox 8"/>
+          <p:cNvSpPr txBox="1"/>
+          <p:nvPr/>
+        </p:nvSpPr>
+        <p:spPr>
+          <a:xfrm>
+            <a:off x="868680" y="2971800"/>
+            <a:ext cx="2030653" cy="3017520"/>
+          </a:xfrm>
+          <a:prstGeom prst="rect">
+            <a:avLst/>
+          </a:prstGeom>
+          <a:noFill/>
+        </p:spPr>
+        <p:txBody>
+          <a:bodyPr wrap="square" anchor="t" lIns="0" rIns="0" tIns="0" bIns="0">
+            <a:spAutoFit/>
+          </a:bodyPr>
+          <a:lstStyle/>
+          <a:p>
+            <a:pPr algn="l">
+              <a:lnSpc>
+                <a:spcPct val="150000"/>
+              </a:lnSpc>
+            </a:pPr>
+            <a:r>
+              <a:rPr sz="1350" b="0">
+                <a:solidFill>
+                  <a:srgbClr val="1C2A33"/>
+                </a:solidFill>
+                <a:latin typeface="楷体"/>
+                <a:ea typeface="楷体"/>
+                <a:cs typeface="楷体"/>
+              </a:rPr>
+              <a:t>交叉分类：同一物质按不同标准（如Na2CO3既是钠盐又是碳酸盐）。</a:t>
+            </a:r>
+          </a:p>
+        </p:txBody>
+      </p:sp>
+      <p:sp>
+        <p:nvSpPr>
+          <p:cNvPr id="10" name="Rounded Rectangle 9"/>
+          <p:cNvSpPr/>
+          <p:nvPr/>
+        </p:nvSpPr>
+        <p:spPr>
+          <a:xfrm>
+            <a:off x="3447973" y="2194560"/>
+            <a:ext cx="2487853" cy="4023360"/>
+          </a:xfrm>
+          <a:prstGeom prst="roundRect">
+            <a:avLst/>
+          </a:prstGeom>
+          <a:solidFill>
+            <a:srgbClr val="FFFFFF"/>
+          </a:solidFill>
+          <a:ln w="20320">
+            <a:solidFill>
+              <a:srgbClr val="2E7D6B"/>
+            </a:solidFill>
+          </a:ln>
+          <a:effectLst/>
+        </p:spPr>
+        <p:style>
+          <a:lnRef idx="1">
+            <a:schemeClr val="accent1"/>
+          </a:lnRef>
+          <a:fillRef idx="3">
+            <a:schemeClr val="accent1"/>
+          </a:fillRef>
+          <a:effectRef idx="2">
+            <a:schemeClr val="accent1"/>
+          </a:effectRef>
+          <a:fontRef idx="minor">
+            <a:schemeClr val="lt1"/>
+          </a:fontRef>
+        </p:style>
+        <p:txBody>
+          <a:bodyPr rtlCol="0" anchor="ctr"/>
+          <a:lstStyle/>
+          <a:p>
+            <a:pPr algn="ctr"/>
+          </a:p>
+        </p:txBody>
+      </p:sp>
+      <p:sp>
+        <p:nvSpPr>
+          <p:cNvPr id="11" name="Rectangle 10"/>
+          <p:cNvSpPr/>
+          <p:nvPr/>
+        </p:nvSpPr>
+        <p:spPr>
+          <a:xfrm>
+            <a:off x="3447973" y="2194560"/>
+            <a:ext cx="2487853" cy="566928"/>
+          </a:xfrm>
+          <a:prstGeom prst="rect">
+            <a:avLst/>
+          </a:prstGeom>
+          <a:solidFill>
+            <a:srgbClr val="2E7D6B"/>
+          </a:solidFill>
+          <a:ln>
+            <a:noFill/>
+          </a:ln>
+          <a:effectLst/>
+        </p:spPr>
+        <p:style>
+          <a:lnRef idx="1">
+            <a:schemeClr val="accent1"/>
+          </a:lnRef>
+          <a:fillRef idx="3">
+            <a:schemeClr val="accent1"/>
+          </a:fillRef>
+          <a:effectRef idx="2">
+            <a:schemeClr val="accent1"/>
+          </a:effectRef>
+          <a:fontRef idx="minor">
+            <a:schemeClr val="lt1"/>
+          </a:fontRef>
+        </p:style>
+        <p:txBody>
+          <a:bodyPr rtlCol="0" anchor="ctr"/>
+          <a:lstStyle/>
+          <a:p>
+            <a:pPr algn="ctr"/>
+          </a:p>
+        </p:txBody>
+      </p:sp>
+      <p:sp>
+        <p:nvSpPr>
+          <p:cNvPr id="12" name="TextBox 11"/>
+          <p:cNvSpPr txBox="1"/>
+          <p:nvPr/>
+        </p:nvSpPr>
+        <p:spPr>
+          <a:xfrm>
+            <a:off x="3447973" y="2313432"/>
+            <a:ext cx="2487853" cy="365760"/>
+          </a:xfrm>
+          <a:prstGeom prst="rect">
+            <a:avLst/>
+          </a:prstGeom>
+          <a:noFill/>
+        </p:spPr>
+        <p:txBody>
+          <a:bodyPr wrap="square" anchor="t" lIns="0" rIns="0" tIns="0" bIns="0">
+            <a:spAutoFit/>
+          </a:bodyPr>
+          <a:lstStyle/>
+          <a:p>
+            <a:pPr algn="ctr"/>
+            <a:r>
+              <a:rPr sz="1500" b="1">
+                <a:solidFill>
+                  <a:srgbClr val="FFFFFF"/>
+                </a:solidFill>
+                <a:latin typeface="微软雅黑"/>
+                <a:ea typeface="微软雅黑"/>
+                <a:cs typeface="微软雅黑"/>
+              </a:rPr>
+              <a:t>重点 2</a:t>
+            </a:r>
+          </a:p>
+        </p:txBody>
+      </p:sp>
+      <p:sp>
+        <p:nvSpPr>
+          <p:cNvPr id="13" name="TextBox 12"/>
+          <p:cNvSpPr txBox="1"/>
+          <p:nvPr/>
+        </p:nvSpPr>
+        <p:spPr>
+          <a:xfrm>
+            <a:off x="3676573" y="2971800"/>
+            <a:ext cx="2030653" cy="3017520"/>
+          </a:xfrm>
+          <a:prstGeom prst="rect">
+            <a:avLst/>
+          </a:prstGeom>
+          <a:noFill/>
+        </p:spPr>
+        <p:txBody>
+          <a:bodyPr wrap="square" anchor="t" lIns="0" rIns="0" tIns="0" bIns="0">
+            <a:spAutoFit/>
+          </a:bodyPr>
+          <a:lstStyle/>
+          <a:p>
+            <a:pPr algn="l">
+              <a:lnSpc>
+                <a:spcPct val="150000"/>
+              </a:lnSpc>
+            </a:pPr>
+            <a:r>
+              <a:rPr sz="1350" b="0">
+                <a:solidFill>
+                  <a:srgbClr val="1C2A33"/>
+                </a:solidFill>
+                <a:latin typeface="楷体"/>
+                <a:ea typeface="楷体"/>
+                <a:cs typeface="楷体"/>
+              </a:rPr>
+              <a:t>树状分类：纯净物→单质/化合物→酸/碱/盐/氧化物逐级细分。</a:t>
+            </a:r>
+          </a:p>
+        </p:txBody>
+      </p:sp>
+      <p:sp>
+        <p:nvSpPr>
+          <p:cNvPr id="14" name="Rounded Rectangle 13"/>
+          <p:cNvSpPr/>
+          <p:nvPr/>
+        </p:nvSpPr>
+        <p:spPr>
+          <a:xfrm>
+            <a:off x="6255867" y="2194560"/>
+            <a:ext cx="2487853" cy="4023360"/>
+          </a:xfrm>
+          <a:prstGeom prst="roundRect">
+            <a:avLst/>
+          </a:prstGeom>
+          <a:solidFill>
+            <a:srgbClr val="FFFFFF"/>
+          </a:solidFill>
+          <a:ln w="20320">
             <a:solidFill>
               <a:srgbClr val="C8A86B"/>
             </a:solidFill>
@@ -4926,107 +5646,23 @@
       </p:sp>
       <p:sp>
         <p:nvSpPr>
-          <p:cNvPr id="6" name="TextBox 5"/>
-          <p:cNvSpPr txBox="1"/>
-          <p:nvPr/>
-        </p:nvSpPr>
-        <p:spPr>
-          <a:xfrm>
-            <a:off x="1371600" y="1481328"/>
-            <a:ext cx="9997135" cy="457200"/>
-          </a:xfrm>
-          <a:prstGeom prst="rect">
-            <a:avLst/>
-          </a:prstGeom>
-          <a:noFill/>
-        </p:spPr>
-        <p:txBody>
-          <a:bodyPr wrap="square" anchor="t" lIns="0" rIns="0" tIns="0" bIns="0">
-            <a:spAutoFit/>
-          </a:bodyPr>
-          <a:lstStyle/>
-          <a:p>
-            <a:pPr algn="l">
-              <a:lnSpc>
-                <a:spcPct val="110000"/>
-              </a:lnSpc>
-            </a:pPr>
-            <a:r>
-              <a:rPr sz="1600" b="1">
-                <a:solidFill>
-                  <a:srgbClr val="1C2A33"/>
-                </a:solidFill>
-                <a:latin typeface="微软雅黑"/>
-                <a:ea typeface="微软雅黑"/>
-                <a:cs typeface="微软雅黑"/>
-              </a:rPr>
-              <a:t/>
-            </a:r>
-          </a:p>
-        </p:txBody>
-      </p:sp>
-      <p:sp>
-        <p:nvSpPr>
-          <p:cNvPr id="7" name="TextBox 6"/>
-          <p:cNvSpPr txBox="1"/>
-          <p:nvPr/>
-        </p:nvSpPr>
-        <p:spPr>
-          <a:xfrm>
-            <a:off x="1371600" y="1920240"/>
-            <a:ext cx="9997135" cy="530352"/>
-          </a:xfrm>
-          <a:prstGeom prst="rect">
-            <a:avLst/>
-          </a:prstGeom>
-          <a:noFill/>
-        </p:spPr>
-        <p:txBody>
-          <a:bodyPr wrap="square" anchor="t" lIns="0" rIns="0" tIns="0" bIns="0">
-            <a:spAutoFit/>
-          </a:bodyPr>
-          <a:lstStyle/>
-          <a:p>
-            <a:pPr algn="l">
-              <a:lnSpc>
-                <a:spcPct val="128000"/>
-              </a:lnSpc>
-            </a:pPr>
-            <a:r>
-              <a:rPr sz="1300" b="0">
-                <a:solidFill>
-                  <a:srgbClr val="1C2A33"/>
-                </a:solidFill>
-                <a:latin typeface="楷体"/>
-                <a:ea typeface="楷体"/>
-                <a:cs typeface="楷体"/>
-              </a:rPr>
-              <a:t>① 交叉分类：同一物质按不同标准（如Na2CO3既是钠盐又是碳酸盐）。</a:t>
-            </a:r>
-          </a:p>
-        </p:txBody>
-      </p:sp>
-      <p:sp>
-        <p:nvSpPr>
-          <p:cNvPr id="8" name="Rounded Rectangle 7"/>
+          <p:cNvPr id="15" name="Rectangle 14"/>
           <p:cNvSpPr/>
           <p:nvPr/>
         </p:nvSpPr>
         <p:spPr>
           <a:xfrm>
-            <a:off x="640080" y="2651760"/>
-            <a:ext cx="10911535" cy="1170432"/>
-          </a:xfrm>
-          <a:prstGeom prst="roundRect">
+            <a:off x="6255867" y="2194560"/>
+            <a:ext cx="2487853" cy="566928"/>
+          </a:xfrm>
+          <a:prstGeom prst="rect">
             <a:avLst/>
           </a:prstGeom>
           <a:solidFill>
-            <a:srgbClr val="FFFFFF"/>
+            <a:srgbClr val="C8A86B"/>
           </a:solidFill>
-          <a:ln w="22860">
-            <a:solidFill>
-              <a:srgbClr val="C8A86B"/>
-            </a:solidFill>
+          <a:ln>
+            <a:noFill/>
           </a:ln>
           <a:effectLst/>
         </p:spPr>
@@ -5054,14 +5690,14 @@
       </p:sp>
       <p:sp>
         <p:nvSpPr>
-          <p:cNvPr id="9" name="TextBox 8"/>
+          <p:cNvPr id="16" name="TextBox 15"/>
           <p:cNvSpPr txBox="1"/>
           <p:nvPr/>
         </p:nvSpPr>
         <p:spPr>
           <a:xfrm>
-            <a:off x="1371600" y="2761488"/>
-            <a:ext cx="9997135" cy="457200"/>
+            <a:off x="6255867" y="2313432"/>
+            <a:ext cx="2487853" cy="365760"/>
           </a:xfrm>
           <a:prstGeom prst="rect">
             <a:avLst/>
@@ -5074,35 +5710,31 @@
           </a:bodyPr>
           <a:lstStyle/>
           <a:p>
-            <a:pPr algn="l">
-              <a:lnSpc>
-                <a:spcPct val="110000"/>
-              </a:lnSpc>
-            </a:pPr>
-            <a:r>
-              <a:rPr sz="1600" b="1">
-                <a:solidFill>
-                  <a:srgbClr val="1C2A33"/>
+            <a:pPr algn="ctr"/>
+            <a:r>
+              <a:rPr sz="1500" b="1">
+                <a:solidFill>
+                  <a:srgbClr val="FFFFFF"/>
                 </a:solidFill>
                 <a:latin typeface="微软雅黑"/>
                 <a:ea typeface="微软雅黑"/>
                 <a:cs typeface="微软雅黑"/>
               </a:rPr>
-              <a:t/>
-            </a:r>
-          </a:p>
-        </p:txBody>
-      </p:sp>
-      <p:sp>
-        <p:nvSpPr>
-          <p:cNvPr id="10" name="TextBox 9"/>
+              <a:t>重点 3</a:t>
+            </a:r>
+          </a:p>
+        </p:txBody>
+      </p:sp>
+      <p:sp>
+        <p:nvSpPr>
+          <p:cNvPr id="17" name="TextBox 16"/>
           <p:cNvSpPr txBox="1"/>
           <p:nvPr/>
         </p:nvSpPr>
         <p:spPr>
           <a:xfrm>
-            <a:off x="1371600" y="3200400"/>
-            <a:ext cx="9997135" cy="530352"/>
+            <a:off x="6484467" y="2971800"/>
+            <a:ext cx="2030653" cy="3017520"/>
           </a:xfrm>
           <a:prstGeom prst="rect">
             <a:avLst/>
@@ -5117,11 +5749,11 @@
           <a:p>
             <a:pPr algn="l">
               <a:lnSpc>
-                <a:spcPct val="128000"/>
+                <a:spcPct val="150000"/>
               </a:lnSpc>
             </a:pPr>
             <a:r>
-              <a:rPr sz="1300" b="0">
+              <a:rPr sz="1350" b="0">
                 <a:solidFill>
                   <a:srgbClr val="1C2A33"/>
                 </a:solidFill>
@@ -5129,21 +5761,21 @@
                 <a:ea typeface="楷体"/>
                 <a:cs typeface="楷体"/>
               </a:rPr>
-              <a:t>② 树状分类：纯净物→单质/化合物→酸/碱/盐/氧化物逐级细分。</a:t>
-            </a:r>
-          </a:p>
-        </p:txBody>
-      </p:sp>
-      <p:sp>
-        <p:nvSpPr>
-          <p:cNvPr id="11" name="Rounded Rectangle 10"/>
+              <a:t>分散系：分散质+分散剂；按粒子直径分溶液(&lt;1nm)/胶体(1-100nm)/浊液(&gt;100nm)。</a:t>
+            </a:r>
+          </a:p>
+        </p:txBody>
+      </p:sp>
+      <p:sp>
+        <p:nvSpPr>
+          <p:cNvPr id="18" name="Rounded Rectangle 17"/>
           <p:cNvSpPr/>
           <p:nvPr/>
         </p:nvSpPr>
         <p:spPr>
           <a:xfrm>
-            <a:off x="640080" y="3931920"/>
-            <a:ext cx="10911535" cy="1170432"/>
+            <a:off x="9063761" y="2194560"/>
+            <a:ext cx="2487853" cy="4023360"/>
           </a:xfrm>
           <a:prstGeom prst="roundRect">
             <a:avLst/>
@@ -5151,9 +5783,9 @@
           <a:solidFill>
             <a:srgbClr val="FFFFFF"/>
           </a:solidFill>
-          <a:ln w="22860">
+          <a:ln w="20320">
             <a:solidFill>
-              <a:srgbClr val="C8A86B"/>
+              <a:srgbClr val="6B6258"/>
             </a:solidFill>
           </a:ln>
           <a:effectLst/>
@@ -5182,107 +5814,23 @@
       </p:sp>
       <p:sp>
         <p:nvSpPr>
-          <p:cNvPr id="12" name="TextBox 11"/>
-          <p:cNvSpPr txBox="1"/>
-          <p:nvPr/>
-        </p:nvSpPr>
-        <p:spPr>
-          <a:xfrm>
-            <a:off x="1371600" y="4041648"/>
-            <a:ext cx="9997135" cy="457200"/>
-          </a:xfrm>
-          <a:prstGeom prst="rect">
-            <a:avLst/>
-          </a:prstGeom>
-          <a:noFill/>
-        </p:spPr>
-        <p:txBody>
-          <a:bodyPr wrap="square" anchor="t" lIns="0" rIns="0" tIns="0" bIns="0">
-            <a:spAutoFit/>
-          </a:bodyPr>
-          <a:lstStyle/>
-          <a:p>
-            <a:pPr algn="l">
-              <a:lnSpc>
-                <a:spcPct val="110000"/>
-              </a:lnSpc>
-            </a:pPr>
-            <a:r>
-              <a:rPr sz="1600" b="1">
-                <a:solidFill>
-                  <a:srgbClr val="1C2A33"/>
-                </a:solidFill>
-                <a:latin typeface="微软雅黑"/>
-                <a:ea typeface="微软雅黑"/>
-                <a:cs typeface="微软雅黑"/>
-              </a:rPr>
-              <a:t/>
-            </a:r>
-          </a:p>
-        </p:txBody>
-      </p:sp>
-      <p:sp>
-        <p:nvSpPr>
-          <p:cNvPr id="13" name="TextBox 12"/>
-          <p:cNvSpPr txBox="1"/>
-          <p:nvPr/>
-        </p:nvSpPr>
-        <p:spPr>
-          <a:xfrm>
-            <a:off x="1371600" y="4480560"/>
-            <a:ext cx="9997135" cy="530352"/>
-          </a:xfrm>
-          <a:prstGeom prst="rect">
-            <a:avLst/>
-          </a:prstGeom>
-          <a:noFill/>
-        </p:spPr>
-        <p:txBody>
-          <a:bodyPr wrap="square" anchor="t" lIns="0" rIns="0" tIns="0" bIns="0">
-            <a:spAutoFit/>
-          </a:bodyPr>
-          <a:lstStyle/>
-          <a:p>
-            <a:pPr algn="l">
-              <a:lnSpc>
-                <a:spcPct val="128000"/>
-              </a:lnSpc>
-            </a:pPr>
-            <a:r>
-              <a:rPr sz="1200" b="0">
-                <a:solidFill>
-                  <a:srgbClr val="1C2A33"/>
-                </a:solidFill>
-                <a:latin typeface="楷体"/>
-                <a:ea typeface="楷体"/>
-                <a:cs typeface="楷体"/>
-              </a:rPr>
-              <a:t>③ 分散系：分散质+分散剂；按粒子直径分溶液(&lt;1nm)/胶体(1-100nm)/浊液(&gt;100nm)。</a:t>
-            </a:r>
-          </a:p>
-        </p:txBody>
-      </p:sp>
-      <p:sp>
-        <p:nvSpPr>
-          <p:cNvPr id="14" name="Rounded Rectangle 13"/>
+          <p:cNvPr id="19" name="Rectangle 18"/>
           <p:cNvSpPr/>
           <p:nvPr/>
         </p:nvSpPr>
         <p:spPr>
           <a:xfrm>
-            <a:off x="640080" y="5212080"/>
-            <a:ext cx="10911535" cy="1170432"/>
-          </a:xfrm>
-          <a:prstGeom prst="roundRect">
+            <a:off x="9063761" y="2194560"/>
+            <a:ext cx="2487853" cy="566928"/>
+          </a:xfrm>
+          <a:prstGeom prst="rect">
             <a:avLst/>
           </a:prstGeom>
           <a:solidFill>
-            <a:srgbClr val="FFFFFF"/>
+            <a:srgbClr val="6B6258"/>
           </a:solidFill>
-          <a:ln w="22860">
-            <a:solidFill>
-              <a:srgbClr val="C8A86B"/>
-            </a:solidFill>
+          <a:ln>
+            <a:noFill/>
           </a:ln>
           <a:effectLst/>
         </p:spPr>
@@ -5310,14 +5858,14 @@
       </p:sp>
       <p:sp>
         <p:nvSpPr>
-          <p:cNvPr id="15" name="TextBox 14"/>
+          <p:cNvPr id="20" name="TextBox 19"/>
           <p:cNvSpPr txBox="1"/>
           <p:nvPr/>
         </p:nvSpPr>
         <p:spPr>
           <a:xfrm>
-            <a:off x="1371600" y="5321808"/>
-            <a:ext cx="9997135" cy="457200"/>
+            <a:off x="9063761" y="2313432"/>
+            <a:ext cx="2487853" cy="365760"/>
           </a:xfrm>
           <a:prstGeom prst="rect">
             <a:avLst/>
@@ -5330,35 +5878,31 @@
           </a:bodyPr>
           <a:lstStyle/>
           <a:p>
-            <a:pPr algn="l">
-              <a:lnSpc>
-                <a:spcPct val="110000"/>
-              </a:lnSpc>
-            </a:pPr>
-            <a:r>
-              <a:rPr sz="1600" b="1">
-                <a:solidFill>
-                  <a:srgbClr val="1C2A33"/>
+            <a:pPr algn="ctr"/>
+            <a:r>
+              <a:rPr sz="1500" b="1">
+                <a:solidFill>
+                  <a:srgbClr val="FFFFFF"/>
                 </a:solidFill>
                 <a:latin typeface="微软雅黑"/>
                 <a:ea typeface="微软雅黑"/>
                 <a:cs typeface="微软雅黑"/>
               </a:rPr>
-              <a:t/>
-            </a:r>
-          </a:p>
-        </p:txBody>
-      </p:sp>
-      <p:sp>
-        <p:nvSpPr>
-          <p:cNvPr id="16" name="TextBox 15"/>
+              <a:t>重点 4</a:t>
+            </a:r>
+          </a:p>
+        </p:txBody>
+      </p:sp>
+      <p:sp>
+        <p:nvSpPr>
+          <p:cNvPr id="21" name="TextBox 20"/>
           <p:cNvSpPr txBox="1"/>
           <p:nvPr/>
         </p:nvSpPr>
         <p:spPr>
           <a:xfrm>
-            <a:off x="1371600" y="5760720"/>
-            <a:ext cx="9997135" cy="530352"/>
+            <a:off x="9292361" y="2971800"/>
+            <a:ext cx="2030653" cy="3017520"/>
           </a:xfrm>
           <a:prstGeom prst="rect">
             <a:avLst/>
@@ -5373,11 +5917,11 @@
           <a:p>
             <a:pPr algn="l">
               <a:lnSpc>
-                <a:spcPct val="128000"/>
+                <a:spcPct val="150000"/>
               </a:lnSpc>
             </a:pPr>
             <a:r>
-              <a:rPr sz="1300" b="0">
+              <a:rPr sz="1350" b="0">
                 <a:solidFill>
                   <a:srgbClr val="1C2A33"/>
                 </a:solidFill>
@@ -5385,14 +5929,14 @@
                 <a:ea typeface="楷体"/>
                 <a:cs typeface="楷体"/>
               </a:rPr>
-              <a:t>④ 胶体特性：丁达尔效应（光亮通路）。</a:t>
-            </a:r>
-          </a:p>
-        </p:txBody>
-      </p:sp>
-      <p:sp>
-        <p:nvSpPr>
-          <p:cNvPr id="17" name="TextBox 16"/>
+              <a:t>胶体特性：丁达尔效应（光亮通路）。</a:t>
+            </a:r>
+          </a:p>
+        </p:txBody>
+      </p:sp>
+      <p:sp>
+        <p:nvSpPr>
+          <p:cNvPr id="22" name="TextBox 21"/>
           <p:cNvSpPr txBox="1"/>
           <p:nvPr/>
         </p:nvSpPr>
@@ -5525,7 +6069,7 @@
                 <a:ea typeface="微软雅黑"/>
                 <a:cs typeface="微软雅黑"/>
               </a:rPr>
-              <a:t>学习路径</a:t>
+              <a:t>方法</a:t>
             </a:r>
           </a:p>
         </p:txBody>
@@ -5576,14 +6120,51 @@
       </p:sp>
       <p:sp>
         <p:nvSpPr>
-          <p:cNvPr id="5" name="Rounded Rectangle 4"/>
+          <p:cNvPr id="5" name="TextBox 4"/>
+          <p:cNvSpPr txBox="1"/>
+          <p:nvPr/>
+        </p:nvSpPr>
+        <p:spPr>
+          <a:xfrm>
+            <a:off x="640080" y="1325880"/>
+            <a:ext cx="10515600" cy="548640"/>
+          </a:xfrm>
+          <a:prstGeom prst="rect">
+            <a:avLst/>
+          </a:prstGeom>
+          <a:noFill/>
+        </p:spPr>
+        <p:txBody>
+          <a:bodyPr wrap="square" anchor="t" lIns="0" rIns="0" tIns="0" bIns="0">
+            <a:spAutoFit/>
+          </a:bodyPr>
+          <a:lstStyle/>
+          <a:p>
+            <a:pPr algn="l"/>
+            <a:r>
+              <a:rPr sz="2800" b="1">
+                <a:solidFill>
+                  <a:srgbClr val="1C2A33"/>
+                </a:solidFill>
+                <a:latin typeface="楷体"/>
+                <a:ea typeface="楷体"/>
+                <a:cs typeface="楷体"/>
+              </a:rPr>
+              <a:t>学习活动与方法</a:t>
+            </a:r>
+          </a:p>
+        </p:txBody>
+      </p:sp>
+      <p:sp>
+        <p:nvSpPr>
+          <p:cNvPr id="6" name="Rounded Rectangle 5"/>
           <p:cNvSpPr/>
           <p:nvPr/>
         </p:nvSpPr>
         <p:spPr>
           <a:xfrm>
-            <a:off x="640080" y="1371600"/>
-            <a:ext cx="10911535" cy="685800"/>
+            <a:off x="640080" y="2194560"/>
+            <a:ext cx="2487853" cy="4023360"/>
           </a:xfrm>
           <a:prstGeom prst="roundRect">
             <a:avLst/>
@@ -5591,7 +6172,7 @@
           <a:solidFill>
             <a:srgbClr val="FFFFFF"/>
           </a:solidFill>
-          <a:ln w="22860">
+          <a:ln w="20320">
             <a:solidFill>
               <a:srgbClr val="2E7D6B"/>
             </a:solidFill>
@@ -5622,14 +6203,14 @@
       </p:sp>
       <p:sp>
         <p:nvSpPr>
-          <p:cNvPr id="6" name="Oval 5"/>
+          <p:cNvPr id="7" name="Oval 6"/>
           <p:cNvSpPr/>
           <p:nvPr/>
         </p:nvSpPr>
         <p:spPr>
           <a:xfrm>
-            <a:off x="804672" y="1536192"/>
-            <a:ext cx="457200" cy="457200"/>
+            <a:off x="1591398" y="2560320"/>
+            <a:ext cx="585216" cy="585216"/>
           </a:xfrm>
           <a:prstGeom prst="ellipse">
             <a:avLst/>
@@ -5666,14 +6247,14 @@
       </p:sp>
       <p:sp>
         <p:nvSpPr>
-          <p:cNvPr id="7" name="TextBox 6"/>
+          <p:cNvPr id="8" name="TextBox 7"/>
           <p:cNvSpPr txBox="1"/>
           <p:nvPr/>
         </p:nvSpPr>
         <p:spPr>
           <a:xfrm>
-            <a:off x="804672" y="1591056"/>
-            <a:ext cx="457200" cy="384048"/>
+            <a:off x="1591398" y="2615184"/>
+            <a:ext cx="585216" cy="468172"/>
           </a:xfrm>
           <a:prstGeom prst="rect">
             <a:avLst/>
@@ -5688,7 +6269,7 @@
           <a:p>
             <a:pPr algn="ctr"/>
             <a:r>
-              <a:rPr sz="1600" b="1">
+              <a:rPr sz="1800" b="1">
                 <a:solidFill>
                   <a:srgbClr val="FFFFFF"/>
                 </a:solidFill>
@@ -5703,14 +6284,14 @@
       </p:sp>
       <p:sp>
         <p:nvSpPr>
-          <p:cNvPr id="8" name="TextBox 7"/>
+          <p:cNvPr id="9" name="TextBox 8"/>
           <p:cNvSpPr txBox="1"/>
           <p:nvPr/>
         </p:nvSpPr>
         <p:spPr>
           <a:xfrm>
-            <a:off x="1371600" y="1481328"/>
-            <a:ext cx="9997135" cy="484632"/>
+            <a:off x="868680" y="3337560"/>
+            <a:ext cx="2030653" cy="2651760"/>
           </a:xfrm>
           <a:prstGeom prst="rect">
             <a:avLst/>
@@ -5723,9 +6304,9 @@
           </a:bodyPr>
           <a:lstStyle/>
           <a:p>
-            <a:pPr algn="l">
+            <a:pPr algn="ctr">
               <a:lnSpc>
-                <a:spcPct val="110000"/>
+                <a:spcPct val="150000"/>
               </a:lnSpc>
             </a:pPr>
             <a:r>
@@ -5733,25 +6314,25 @@
                 <a:solidFill>
                   <a:srgbClr val="1C2A33"/>
                 </a:solidFill>
-                <a:latin typeface="微软雅黑"/>
-                <a:ea typeface="微软雅黑"/>
-                <a:cs typeface="微软雅黑"/>
+                <a:latin typeface="楷体"/>
+                <a:ea typeface="楷体"/>
+                <a:cs typeface="楷体"/>
               </a:rPr>
-              <a:t>Step 1 导入</a:t>
-            </a:r>
-          </a:p>
-        </p:txBody>
-      </p:sp>
-      <p:sp>
-        <p:nvSpPr>
-          <p:cNvPr id="9" name="Rounded Rectangle 8"/>
+              <a:t>分类活动法。</a:t>
+            </a:r>
+          </a:p>
+        </p:txBody>
+      </p:sp>
+      <p:sp>
+        <p:nvSpPr>
+          <p:cNvPr id="10" name="Rounded Rectangle 9"/>
           <p:cNvSpPr/>
           <p:nvPr/>
         </p:nvSpPr>
         <p:spPr>
           <a:xfrm>
-            <a:off x="640080" y="2194560"/>
-            <a:ext cx="10911535" cy="685800"/>
+            <a:off x="3447973" y="2194560"/>
+            <a:ext cx="2487853" cy="4023360"/>
           </a:xfrm>
           <a:prstGeom prst="roundRect">
             <a:avLst/>
@@ -5759,9 +6340,9 @@
           <a:solidFill>
             <a:srgbClr val="FFFFFF"/>
           </a:solidFill>
-          <a:ln w="22860">
+          <a:ln w="20320">
             <a:solidFill>
-              <a:srgbClr val="2E7D6B"/>
+              <a:srgbClr val="B23A2A"/>
             </a:solidFill>
           </a:ln>
           <a:effectLst/>
@@ -5790,20 +6371,20 @@
       </p:sp>
       <p:sp>
         <p:nvSpPr>
-          <p:cNvPr id="10" name="Oval 9"/>
+          <p:cNvPr id="11" name="Oval 10"/>
           <p:cNvSpPr/>
           <p:nvPr/>
         </p:nvSpPr>
         <p:spPr>
           <a:xfrm>
-            <a:off x="804672" y="2359152"/>
-            <a:ext cx="457200" cy="457200"/>
+            <a:off x="4399292" y="2560320"/>
+            <a:ext cx="585216" cy="585216"/>
           </a:xfrm>
           <a:prstGeom prst="ellipse">
             <a:avLst/>
           </a:prstGeom>
           <a:solidFill>
-            <a:srgbClr val="2E7D6B"/>
+            <a:srgbClr val="B23A2A"/>
           </a:solidFill>
           <a:ln>
             <a:noFill/>
@@ -5834,14 +6415,14 @@
       </p:sp>
       <p:sp>
         <p:nvSpPr>
-          <p:cNvPr id="11" name="TextBox 10"/>
+          <p:cNvPr id="12" name="TextBox 11"/>
           <p:cNvSpPr txBox="1"/>
           <p:nvPr/>
         </p:nvSpPr>
         <p:spPr>
           <a:xfrm>
-            <a:off x="804672" y="2414016"/>
-            <a:ext cx="457200" cy="384048"/>
+            <a:off x="4399292" y="2615184"/>
+            <a:ext cx="585216" cy="468172"/>
           </a:xfrm>
           <a:prstGeom prst="rect">
             <a:avLst/>
@@ -5856,7 +6437,7 @@
           <a:p>
             <a:pPr algn="ctr"/>
             <a:r>
-              <a:rPr sz="1600" b="1">
+              <a:rPr sz="1800" b="1">
                 <a:solidFill>
                   <a:srgbClr val="FFFFFF"/>
                 </a:solidFill>
@@ -5871,14 +6452,14 @@
       </p:sp>
       <p:sp>
         <p:nvSpPr>
-          <p:cNvPr id="12" name="TextBox 11"/>
+          <p:cNvPr id="13" name="TextBox 12"/>
           <p:cNvSpPr txBox="1"/>
           <p:nvPr/>
         </p:nvSpPr>
         <p:spPr>
           <a:xfrm>
-            <a:off x="1371600" y="2304288"/>
-            <a:ext cx="9997135" cy="484632"/>
+            <a:off x="3676573" y="3337560"/>
+            <a:ext cx="2030653" cy="2651760"/>
           </a:xfrm>
           <a:prstGeom prst="rect">
             <a:avLst/>
@@ -5891,9 +6472,9 @@
           </a:bodyPr>
           <a:lstStyle/>
           <a:p>
-            <a:pPr algn="l">
+            <a:pPr algn="ctr">
               <a:lnSpc>
-                <a:spcPct val="110000"/>
+                <a:spcPct val="150000"/>
               </a:lnSpc>
             </a:pPr>
             <a:r>
@@ -5901,25 +6482,25 @@
                 <a:solidFill>
                   <a:srgbClr val="1C2A33"/>
                 </a:solidFill>
-                <a:latin typeface="微软雅黑"/>
-                <a:ea typeface="微软雅黑"/>
-                <a:cs typeface="微软雅黑"/>
+                <a:latin typeface="楷体"/>
+                <a:ea typeface="楷体"/>
+                <a:cs typeface="楷体"/>
               </a:rPr>
-              <a:t>Step 2 交叉分类法</a:t>
-            </a:r>
-          </a:p>
-        </p:txBody>
-      </p:sp>
-      <p:sp>
-        <p:nvSpPr>
-          <p:cNvPr id="13" name="Rounded Rectangle 12"/>
+              <a:t>对比实验法(溶液vs胶体丁达尔)。</a:t>
+            </a:r>
+          </a:p>
+        </p:txBody>
+      </p:sp>
+      <p:sp>
+        <p:nvSpPr>
+          <p:cNvPr id="14" name="Rounded Rectangle 13"/>
           <p:cNvSpPr/>
           <p:nvPr/>
         </p:nvSpPr>
         <p:spPr>
           <a:xfrm>
-            <a:off x="640080" y="3017520"/>
-            <a:ext cx="10911535" cy="685800"/>
+            <a:off x="6255867" y="2194560"/>
+            <a:ext cx="2487853" cy="4023360"/>
           </a:xfrm>
           <a:prstGeom prst="roundRect">
             <a:avLst/>
@@ -5927,9 +6508,9 @@
           <a:solidFill>
             <a:srgbClr val="FFFFFF"/>
           </a:solidFill>
-          <a:ln w="22860">
+          <a:ln w="20320">
             <a:solidFill>
-              <a:srgbClr val="2E7D6B"/>
+              <a:srgbClr val="C8A86B"/>
             </a:solidFill>
           </a:ln>
           <a:effectLst/>
@@ -5958,20 +6539,20 @@
       </p:sp>
       <p:sp>
         <p:nvSpPr>
-          <p:cNvPr id="14" name="Oval 13"/>
+          <p:cNvPr id="15" name="Oval 14"/>
           <p:cNvSpPr/>
           <p:nvPr/>
         </p:nvSpPr>
         <p:spPr>
           <a:xfrm>
-            <a:off x="804672" y="3182112"/>
-            <a:ext cx="457200" cy="457200"/>
+            <a:off x="7207186" y="2560320"/>
+            <a:ext cx="585216" cy="585216"/>
           </a:xfrm>
           <a:prstGeom prst="ellipse">
             <a:avLst/>
           </a:prstGeom>
           <a:solidFill>
-            <a:srgbClr val="2E7D6B"/>
+            <a:srgbClr val="C8A86B"/>
           </a:solidFill>
           <a:ln>
             <a:noFill/>
@@ -6002,14 +6583,14 @@
       </p:sp>
       <p:sp>
         <p:nvSpPr>
-          <p:cNvPr id="15" name="TextBox 14"/>
+          <p:cNvPr id="16" name="TextBox 15"/>
           <p:cNvSpPr txBox="1"/>
           <p:nvPr/>
         </p:nvSpPr>
         <p:spPr>
           <a:xfrm>
-            <a:off x="804672" y="3236976"/>
-            <a:ext cx="457200" cy="384048"/>
+            <a:off x="7207186" y="2615184"/>
+            <a:ext cx="585216" cy="468172"/>
           </a:xfrm>
           <a:prstGeom prst="rect">
             <a:avLst/>
@@ -6024,7 +6605,7 @@
           <a:p>
             <a:pPr algn="ctr"/>
             <a:r>
-              <a:rPr sz="1600" b="1">
+              <a:rPr sz="1800" b="1">
                 <a:solidFill>
                   <a:srgbClr val="FFFFFF"/>
                 </a:solidFill>
@@ -6039,14 +6620,14 @@
       </p:sp>
       <p:sp>
         <p:nvSpPr>
-          <p:cNvPr id="16" name="TextBox 15"/>
+          <p:cNvPr id="17" name="TextBox 16"/>
           <p:cNvSpPr txBox="1"/>
           <p:nvPr/>
         </p:nvSpPr>
         <p:spPr>
           <a:xfrm>
-            <a:off x="1371600" y="3127248"/>
-            <a:ext cx="9997135" cy="484632"/>
+            <a:off x="6484467" y="3337560"/>
+            <a:ext cx="2030653" cy="2651760"/>
           </a:xfrm>
           <a:prstGeom prst="rect">
             <a:avLst/>
@@ -6059,9 +6640,9 @@
           </a:bodyPr>
           <a:lstStyle/>
           <a:p>
-            <a:pPr algn="l">
+            <a:pPr algn="ctr">
               <a:lnSpc>
-                <a:spcPct val="110000"/>
+                <a:spcPct val="150000"/>
               </a:lnSpc>
             </a:pPr>
             <a:r>
@@ -6069,25 +6650,25 @@
                 <a:solidFill>
                   <a:srgbClr val="1C2A33"/>
                 </a:solidFill>
-                <a:latin typeface="微软雅黑"/>
-                <a:ea typeface="微软雅黑"/>
-                <a:cs typeface="微软雅黑"/>
+                <a:latin typeface="楷体"/>
+                <a:ea typeface="楷体"/>
+                <a:cs typeface="楷体"/>
               </a:rPr>
-              <a:t>Step 3 树状分类法</a:t>
-            </a:r>
-          </a:p>
-        </p:txBody>
-      </p:sp>
-      <p:sp>
-        <p:nvSpPr>
-          <p:cNvPr id="17" name="Rounded Rectangle 16"/>
+              <a:t>树状图建模。</a:t>
+            </a:r>
+          </a:p>
+        </p:txBody>
+      </p:sp>
+      <p:sp>
+        <p:nvSpPr>
+          <p:cNvPr id="18" name="Rounded Rectangle 17"/>
           <p:cNvSpPr/>
           <p:nvPr/>
         </p:nvSpPr>
         <p:spPr>
           <a:xfrm>
-            <a:off x="640080" y="3840480"/>
-            <a:ext cx="10911535" cy="685800"/>
+            <a:off x="9063761" y="2194560"/>
+            <a:ext cx="2487853" cy="4023360"/>
           </a:xfrm>
           <a:prstGeom prst="roundRect">
             <a:avLst/>
@@ -6095,9 +6676,9 @@
           <a:solidFill>
             <a:srgbClr val="FFFFFF"/>
           </a:solidFill>
-          <a:ln w="22860">
+          <a:ln w="20320">
             <a:solidFill>
-              <a:srgbClr val="2E7D6B"/>
+              <a:srgbClr val="6B6258"/>
             </a:solidFill>
           </a:ln>
           <a:effectLst/>
@@ -6126,20 +6707,20 @@
       </p:sp>
       <p:sp>
         <p:nvSpPr>
-          <p:cNvPr id="18" name="Oval 17"/>
+          <p:cNvPr id="19" name="Oval 18"/>
           <p:cNvSpPr/>
           <p:nvPr/>
         </p:nvSpPr>
         <p:spPr>
           <a:xfrm>
-            <a:off x="804672" y="4005072"/>
-            <a:ext cx="457200" cy="457200"/>
+            <a:off x="10015080" y="2560320"/>
+            <a:ext cx="585216" cy="585216"/>
           </a:xfrm>
           <a:prstGeom prst="ellipse">
             <a:avLst/>
           </a:prstGeom>
           <a:solidFill>
-            <a:srgbClr val="2E7D6B"/>
+            <a:srgbClr val="6B6258"/>
           </a:solidFill>
           <a:ln>
             <a:noFill/>
@@ -6170,14 +6751,14 @@
       </p:sp>
       <p:sp>
         <p:nvSpPr>
-          <p:cNvPr id="19" name="TextBox 18"/>
+          <p:cNvPr id="20" name="TextBox 19"/>
           <p:cNvSpPr txBox="1"/>
           <p:nvPr/>
         </p:nvSpPr>
         <p:spPr>
           <a:xfrm>
-            <a:off x="804672" y="4059936"/>
-            <a:ext cx="457200" cy="384048"/>
+            <a:off x="10015080" y="2615184"/>
+            <a:ext cx="585216" cy="468172"/>
           </a:xfrm>
           <a:prstGeom prst="rect">
             <a:avLst/>
@@ -6192,7 +6773,7 @@
           <a:p>
             <a:pPr algn="ctr"/>
             <a:r>
-              <a:rPr sz="1600" b="1">
+              <a:rPr sz="1800" b="1">
                 <a:solidFill>
                   <a:srgbClr val="FFFFFF"/>
                 </a:solidFill>
@@ -6207,14 +6788,14 @@
       </p:sp>
       <p:sp>
         <p:nvSpPr>
-          <p:cNvPr id="20" name="TextBox 19"/>
+          <p:cNvPr id="21" name="TextBox 20"/>
           <p:cNvSpPr txBox="1"/>
           <p:nvPr/>
         </p:nvSpPr>
         <p:spPr>
           <a:xfrm>
-            <a:off x="1371600" y="3950208"/>
-            <a:ext cx="9997135" cy="484632"/>
+            <a:off x="9292361" y="3337560"/>
+            <a:ext cx="2030653" cy="2651760"/>
           </a:xfrm>
           <a:prstGeom prst="rect">
             <a:avLst/>
@@ -6227,9 +6808,9 @@
           </a:bodyPr>
           <a:lstStyle/>
           <a:p>
-            <a:pPr algn="l">
+            <a:pPr algn="ctr">
               <a:lnSpc>
-                <a:spcPct val="110000"/>
+                <a:spcPct val="150000"/>
               </a:lnSpc>
             </a:pPr>
             <a:r>
@@ -6237,354 +6818,18 @@
                 <a:solidFill>
                   <a:srgbClr val="1C2A33"/>
                 </a:solidFill>
-                <a:latin typeface="微软雅黑"/>
-                <a:ea typeface="微软雅黑"/>
-                <a:cs typeface="微软雅黑"/>
+                <a:latin typeface="楷体"/>
+                <a:ea typeface="楷体"/>
+                <a:cs typeface="楷体"/>
               </a:rPr>
-              <a:t>Step 4 分散系</a:t>
-            </a:r>
-          </a:p>
-        </p:txBody>
-      </p:sp>
-      <p:sp>
-        <p:nvSpPr>
-          <p:cNvPr id="21" name="Rounded Rectangle 20"/>
-          <p:cNvSpPr/>
-          <p:nvPr/>
-        </p:nvSpPr>
-        <p:spPr>
-          <a:xfrm>
-            <a:off x="640080" y="4663440"/>
-            <a:ext cx="10911535" cy="685800"/>
-          </a:xfrm>
-          <a:prstGeom prst="roundRect">
-            <a:avLst/>
-          </a:prstGeom>
-          <a:solidFill>
-            <a:srgbClr val="FFFFFF"/>
-          </a:solidFill>
-          <a:ln w="22860">
-            <a:solidFill>
-              <a:srgbClr val="2E7D6B"/>
-            </a:solidFill>
-          </a:ln>
-          <a:effectLst/>
-        </p:spPr>
-        <p:style>
-          <a:lnRef idx="1">
-            <a:schemeClr val="accent1"/>
-          </a:lnRef>
-          <a:fillRef idx="3">
-            <a:schemeClr val="accent1"/>
-          </a:fillRef>
-          <a:effectRef idx="2">
-            <a:schemeClr val="accent1"/>
-          </a:effectRef>
-          <a:fontRef idx="minor">
-            <a:schemeClr val="lt1"/>
-          </a:fontRef>
-        </p:style>
-        <p:txBody>
-          <a:bodyPr rtlCol="0" anchor="ctr"/>
-          <a:lstStyle/>
-          <a:p>
-            <a:pPr algn="ctr"/>
-          </a:p>
-        </p:txBody>
-      </p:sp>
-      <p:sp>
-        <p:nvSpPr>
-          <p:cNvPr id="22" name="Oval 21"/>
-          <p:cNvSpPr/>
-          <p:nvPr/>
-        </p:nvSpPr>
-        <p:spPr>
-          <a:xfrm>
-            <a:off x="804672" y="4828032"/>
-            <a:ext cx="457200" cy="457200"/>
-          </a:xfrm>
-          <a:prstGeom prst="ellipse">
-            <a:avLst/>
-          </a:prstGeom>
-          <a:solidFill>
-            <a:srgbClr val="2E7D6B"/>
-          </a:solidFill>
-          <a:ln>
-            <a:noFill/>
-          </a:ln>
-          <a:effectLst/>
-        </p:spPr>
-        <p:style>
-          <a:lnRef idx="1">
-            <a:schemeClr val="accent1"/>
-          </a:lnRef>
-          <a:fillRef idx="3">
-            <a:schemeClr val="accent1"/>
-          </a:fillRef>
-          <a:effectRef idx="2">
-            <a:schemeClr val="accent1"/>
-          </a:effectRef>
-          <a:fontRef idx="minor">
-            <a:schemeClr val="lt1"/>
-          </a:fontRef>
-        </p:style>
-        <p:txBody>
-          <a:bodyPr rtlCol="0" anchor="ctr"/>
-          <a:lstStyle/>
-          <a:p>
-            <a:pPr algn="ctr"/>
-          </a:p>
-        </p:txBody>
-      </p:sp>
-      <p:sp>
-        <p:nvSpPr>
-          <p:cNvPr id="23" name="TextBox 22"/>
-          <p:cNvSpPr txBox="1"/>
-          <p:nvPr/>
-        </p:nvSpPr>
-        <p:spPr>
-          <a:xfrm>
-            <a:off x="804672" y="4882896"/>
-            <a:ext cx="457200" cy="384048"/>
-          </a:xfrm>
-          <a:prstGeom prst="rect">
-            <a:avLst/>
-          </a:prstGeom>
-          <a:noFill/>
-        </p:spPr>
-        <p:txBody>
-          <a:bodyPr wrap="square" anchor="t" lIns="0" rIns="0" tIns="0" bIns="0">
-            <a:spAutoFit/>
-          </a:bodyPr>
-          <a:lstStyle/>
-          <a:p>
-            <a:pPr algn="ctr"/>
-            <a:r>
-              <a:rPr sz="1600" b="1">
-                <a:solidFill>
-                  <a:srgbClr val="FFFFFF"/>
-                </a:solidFill>
-                <a:latin typeface="微软雅黑"/>
-                <a:ea typeface="微软雅黑"/>
-                <a:cs typeface="微软雅黑"/>
-              </a:rPr>
-              <a:t>5</a:t>
-            </a:r>
-          </a:p>
-        </p:txBody>
-      </p:sp>
-      <p:sp>
-        <p:nvSpPr>
-          <p:cNvPr id="24" name="TextBox 23"/>
-          <p:cNvSpPr txBox="1"/>
-          <p:nvPr/>
-        </p:nvSpPr>
-        <p:spPr>
-          <a:xfrm>
-            <a:off x="1371600" y="4773168"/>
-            <a:ext cx="9997135" cy="484632"/>
-          </a:xfrm>
-          <a:prstGeom prst="rect">
-            <a:avLst/>
-          </a:prstGeom>
-          <a:noFill/>
-        </p:spPr>
-        <p:txBody>
-          <a:bodyPr wrap="square" anchor="t" lIns="0" rIns="0" tIns="0" bIns="0">
-            <a:spAutoFit/>
-          </a:bodyPr>
-          <a:lstStyle/>
-          <a:p>
-            <a:pPr algn="l">
-              <a:lnSpc>
-                <a:spcPct val="110000"/>
-              </a:lnSpc>
-            </a:pPr>
-            <a:r>
-              <a:rPr sz="1400" b="1">
-                <a:solidFill>
-                  <a:srgbClr val="1C2A33"/>
-                </a:solidFill>
-                <a:latin typeface="微软雅黑"/>
-                <a:ea typeface="微软雅黑"/>
-                <a:cs typeface="微软雅黑"/>
-              </a:rPr>
-              <a:t>Step 5 丁达尔效应实验</a:t>
-            </a:r>
-          </a:p>
-        </p:txBody>
-      </p:sp>
-      <p:sp>
-        <p:nvSpPr>
-          <p:cNvPr id="25" name="Rounded Rectangle 24"/>
-          <p:cNvSpPr/>
-          <p:nvPr/>
-        </p:nvSpPr>
-        <p:spPr>
-          <a:xfrm>
-            <a:off x="640080" y="5486400"/>
-            <a:ext cx="10911535" cy="685800"/>
-          </a:xfrm>
-          <a:prstGeom prst="roundRect">
-            <a:avLst/>
-          </a:prstGeom>
-          <a:solidFill>
-            <a:srgbClr val="FFFFFF"/>
-          </a:solidFill>
-          <a:ln w="22860">
-            <a:solidFill>
-              <a:srgbClr val="2E7D6B"/>
-            </a:solidFill>
-          </a:ln>
-          <a:effectLst/>
-        </p:spPr>
-        <p:style>
-          <a:lnRef idx="1">
-            <a:schemeClr val="accent1"/>
-          </a:lnRef>
-          <a:fillRef idx="3">
-            <a:schemeClr val="accent1"/>
-          </a:fillRef>
-          <a:effectRef idx="2">
-            <a:schemeClr val="accent1"/>
-          </a:effectRef>
-          <a:fontRef idx="minor">
-            <a:schemeClr val="lt1"/>
-          </a:fontRef>
-        </p:style>
-        <p:txBody>
-          <a:bodyPr rtlCol="0" anchor="ctr"/>
-          <a:lstStyle/>
-          <a:p>
-            <a:pPr algn="ctr"/>
-          </a:p>
-        </p:txBody>
-      </p:sp>
-      <p:sp>
-        <p:nvSpPr>
-          <p:cNvPr id="26" name="Oval 25"/>
-          <p:cNvSpPr/>
-          <p:nvPr/>
-        </p:nvSpPr>
-        <p:spPr>
-          <a:xfrm>
-            <a:off x="804672" y="5650992"/>
-            <a:ext cx="457200" cy="457200"/>
-          </a:xfrm>
-          <a:prstGeom prst="ellipse">
-            <a:avLst/>
-          </a:prstGeom>
-          <a:solidFill>
-            <a:srgbClr val="2E7D6B"/>
-          </a:solidFill>
-          <a:ln>
-            <a:noFill/>
-          </a:ln>
-          <a:effectLst/>
-        </p:spPr>
-        <p:style>
-          <a:lnRef idx="1">
-            <a:schemeClr val="accent1"/>
-          </a:lnRef>
-          <a:fillRef idx="3">
-            <a:schemeClr val="accent1"/>
-          </a:fillRef>
-          <a:effectRef idx="2">
-            <a:schemeClr val="accent1"/>
-          </a:effectRef>
-          <a:fontRef idx="minor">
-            <a:schemeClr val="lt1"/>
-          </a:fontRef>
-        </p:style>
-        <p:txBody>
-          <a:bodyPr rtlCol="0" anchor="ctr"/>
-          <a:lstStyle/>
-          <a:p>
-            <a:pPr algn="ctr"/>
-          </a:p>
-        </p:txBody>
-      </p:sp>
-      <p:sp>
-        <p:nvSpPr>
-          <p:cNvPr id="27" name="TextBox 26"/>
-          <p:cNvSpPr txBox="1"/>
-          <p:nvPr/>
-        </p:nvSpPr>
-        <p:spPr>
-          <a:xfrm>
-            <a:off x="804672" y="5705856"/>
-            <a:ext cx="457200" cy="384048"/>
-          </a:xfrm>
-          <a:prstGeom prst="rect">
-            <a:avLst/>
-          </a:prstGeom>
-          <a:noFill/>
-        </p:spPr>
-        <p:txBody>
-          <a:bodyPr wrap="square" anchor="t" lIns="0" rIns="0" tIns="0" bIns="0">
-            <a:spAutoFit/>
-          </a:bodyPr>
-          <a:lstStyle/>
-          <a:p>
-            <a:pPr algn="ctr"/>
-            <a:r>
-              <a:rPr sz="1600" b="1">
-                <a:solidFill>
-                  <a:srgbClr val="FFFFFF"/>
-                </a:solidFill>
-                <a:latin typeface="微软雅黑"/>
-                <a:ea typeface="微软雅黑"/>
-                <a:cs typeface="微软雅黑"/>
-              </a:rPr>
-              <a:t>6</a:t>
-            </a:r>
-          </a:p>
-        </p:txBody>
-      </p:sp>
-      <p:sp>
-        <p:nvSpPr>
-          <p:cNvPr id="28" name="TextBox 27"/>
-          <p:cNvSpPr txBox="1"/>
-          <p:nvPr/>
-        </p:nvSpPr>
-        <p:spPr>
-          <a:xfrm>
-            <a:off x="1371600" y="5596128"/>
-            <a:ext cx="9997135" cy="484632"/>
-          </a:xfrm>
-          <a:prstGeom prst="rect">
-            <a:avLst/>
-          </a:prstGeom>
-          <a:noFill/>
-        </p:spPr>
-        <p:txBody>
-          <a:bodyPr wrap="square" anchor="t" lIns="0" rIns="0" tIns="0" bIns="0">
-            <a:spAutoFit/>
-          </a:bodyPr>
-          <a:lstStyle/>
-          <a:p>
-            <a:pPr algn="l">
-              <a:lnSpc>
-                <a:spcPct val="110000"/>
-              </a:lnSpc>
-            </a:pPr>
-            <a:r>
-              <a:rPr sz="1600" b="1">
-                <a:solidFill>
-                  <a:srgbClr val="1C2A33"/>
-                </a:solidFill>
-                <a:latin typeface="微软雅黑"/>
-                <a:ea typeface="微软雅黑"/>
-                <a:cs typeface="微软雅黑"/>
-              </a:rPr>
-              <a:t>Step 6 小结+作业</a:t>
-            </a:r>
-          </a:p>
-        </p:txBody>
-      </p:sp>
-      <p:sp>
-        <p:nvSpPr>
-          <p:cNvPr id="29" name="TextBox 28"/>
+              <a:t>概念辨析法。</a:t>
+            </a:r>
+          </a:p>
+        </p:txBody>
+      </p:sp>
+      <p:sp>
+        <p:nvSpPr>
+          <p:cNvPr id="22" name="TextBox 21"/>
           <p:cNvSpPr txBox="1"/>
           <p:nvPr/>
         </p:nvSpPr>
@@ -6711,13 +6956,13 @@
             <a:r>
               <a:rPr sz="1300" b="1">
                 <a:solidFill>
-                  <a:srgbClr val="B23A2A"/>
+                  <a:srgbClr val="C8A86B"/>
                 </a:solidFill>
                 <a:latin typeface="微软雅黑"/>
                 <a:ea typeface="微软雅黑"/>
                 <a:cs typeface="微软雅黑"/>
               </a:rPr>
-              <a:t>易混易错</a:t>
+              <a:t>难点</a:t>
             </a:r>
           </a:p>
         </p:txBody>
@@ -6734,6 +6979,342 @@
             <a:ext cx="822960" cy="30480"/>
           </a:xfrm>
           <a:prstGeom prst="rect">
+            <a:avLst/>
+          </a:prstGeom>
+          <a:solidFill>
+            <a:srgbClr val="C8A86B"/>
+          </a:solidFill>
+          <a:ln>
+            <a:noFill/>
+          </a:ln>
+          <a:effectLst/>
+        </p:spPr>
+        <p:style>
+          <a:lnRef idx="1">
+            <a:schemeClr val="accent1"/>
+          </a:lnRef>
+          <a:fillRef idx="3">
+            <a:schemeClr val="accent1"/>
+          </a:fillRef>
+          <a:effectRef idx="2">
+            <a:schemeClr val="accent1"/>
+          </a:effectRef>
+          <a:fontRef idx="minor">
+            <a:schemeClr val="lt1"/>
+          </a:fontRef>
+        </p:style>
+        <p:txBody>
+          <a:bodyPr rtlCol="0" anchor="ctr"/>
+          <a:lstStyle/>
+          <a:p>
+            <a:pPr algn="ctr"/>
+          </a:p>
+        </p:txBody>
+      </p:sp>
+      <p:sp>
+        <p:nvSpPr>
+          <p:cNvPr id="5" name="TextBox 4"/>
+          <p:cNvSpPr txBox="1"/>
+          <p:nvPr/>
+        </p:nvSpPr>
+        <p:spPr>
+          <a:xfrm>
+            <a:off x="640080" y="1325880"/>
+            <a:ext cx="10515600" cy="548640"/>
+          </a:xfrm>
+          <a:prstGeom prst="rect">
+            <a:avLst/>
+          </a:prstGeom>
+          <a:noFill/>
+        </p:spPr>
+        <p:txBody>
+          <a:bodyPr wrap="square" anchor="t" lIns="0" rIns="0" tIns="0" bIns="0">
+            <a:spAutoFit/>
+          </a:bodyPr>
+          <a:lstStyle/>
+          <a:p>
+            <a:pPr algn="l"/>
+            <a:r>
+              <a:rPr sz="2800" b="1">
+                <a:solidFill>
+                  <a:srgbClr val="1C2A33"/>
+                </a:solidFill>
+                <a:latin typeface="楷体"/>
+                <a:ea typeface="楷体"/>
+                <a:cs typeface="楷体"/>
+              </a:rPr>
+              <a:t>三处易卡住的地方</a:t>
+            </a:r>
+          </a:p>
+        </p:txBody>
+      </p:sp>
+      <p:sp>
+        <p:nvSpPr>
+          <p:cNvPr id="6" name="Rounded Rectangle 5"/>
+          <p:cNvSpPr/>
+          <p:nvPr/>
+        </p:nvSpPr>
+        <p:spPr>
+          <a:xfrm>
+            <a:off x="640080" y="2194560"/>
+            <a:ext cx="3362858" cy="4023360"/>
+          </a:xfrm>
+          <a:prstGeom prst="roundRect">
+            <a:avLst/>
+          </a:prstGeom>
+          <a:solidFill>
+            <a:srgbClr val="FFFFFF"/>
+          </a:solidFill>
+          <a:ln w="20320">
+            <a:solidFill>
+              <a:srgbClr val="C8A86B"/>
+            </a:solidFill>
+          </a:ln>
+          <a:effectLst/>
+        </p:spPr>
+        <p:style>
+          <a:lnRef idx="1">
+            <a:schemeClr val="accent1"/>
+          </a:lnRef>
+          <a:fillRef idx="3">
+            <a:schemeClr val="accent1"/>
+          </a:fillRef>
+          <a:effectRef idx="2">
+            <a:schemeClr val="accent1"/>
+          </a:effectRef>
+          <a:fontRef idx="minor">
+            <a:schemeClr val="lt1"/>
+          </a:fontRef>
+        </p:style>
+        <p:txBody>
+          <a:bodyPr rtlCol="0" anchor="ctr"/>
+          <a:lstStyle/>
+          <a:p>
+            <a:pPr algn="ctr"/>
+          </a:p>
+        </p:txBody>
+      </p:sp>
+      <p:sp>
+        <p:nvSpPr>
+          <p:cNvPr id="7" name="Oval 6"/>
+          <p:cNvSpPr/>
+          <p:nvPr/>
+        </p:nvSpPr>
+        <p:spPr>
+          <a:xfrm>
+            <a:off x="896112" y="2468880"/>
+            <a:ext cx="548640" cy="548640"/>
+          </a:xfrm>
+          <a:prstGeom prst="ellipse">
+            <a:avLst/>
+          </a:prstGeom>
+          <a:solidFill>
+            <a:srgbClr val="C8A86B"/>
+          </a:solidFill>
+          <a:ln>
+            <a:noFill/>
+          </a:ln>
+          <a:effectLst/>
+        </p:spPr>
+        <p:style>
+          <a:lnRef idx="1">
+            <a:schemeClr val="accent1"/>
+          </a:lnRef>
+          <a:fillRef idx="3">
+            <a:schemeClr val="accent1"/>
+          </a:fillRef>
+          <a:effectRef idx="2">
+            <a:schemeClr val="accent1"/>
+          </a:effectRef>
+          <a:fontRef idx="minor">
+            <a:schemeClr val="lt1"/>
+          </a:fontRef>
+        </p:style>
+        <p:txBody>
+          <a:bodyPr rtlCol="0" anchor="ctr"/>
+          <a:lstStyle/>
+          <a:p>
+            <a:pPr algn="ctr"/>
+          </a:p>
+        </p:txBody>
+      </p:sp>
+      <p:sp>
+        <p:nvSpPr>
+          <p:cNvPr id="8" name="TextBox 7"/>
+          <p:cNvSpPr txBox="1"/>
+          <p:nvPr/>
+        </p:nvSpPr>
+        <p:spPr>
+          <a:xfrm>
+            <a:off x="896112" y="2523744"/>
+            <a:ext cx="548640" cy="438912"/>
+          </a:xfrm>
+          <a:prstGeom prst="rect">
+            <a:avLst/>
+          </a:prstGeom>
+          <a:noFill/>
+        </p:spPr>
+        <p:txBody>
+          <a:bodyPr wrap="square" anchor="t" lIns="0" rIns="0" tIns="0" bIns="0">
+            <a:spAutoFit/>
+          </a:bodyPr>
+          <a:lstStyle/>
+          <a:p>
+            <a:pPr algn="ctr"/>
+            <a:r>
+              <a:rPr sz="1800" b="1">
+                <a:solidFill>
+                  <a:srgbClr val="FFFFFF"/>
+                </a:solidFill>
+                <a:latin typeface="微软雅黑"/>
+                <a:ea typeface="微软雅黑"/>
+                <a:cs typeface="微软雅黑"/>
+              </a:rPr>
+              <a:t>1</a:t>
+            </a:r>
+          </a:p>
+        </p:txBody>
+      </p:sp>
+      <p:sp>
+        <p:nvSpPr>
+          <p:cNvPr id="9" name="TextBox 8"/>
+          <p:cNvSpPr txBox="1"/>
+          <p:nvPr/>
+        </p:nvSpPr>
+        <p:spPr>
+          <a:xfrm>
+            <a:off x="1600200" y="2487168"/>
+            <a:ext cx="2219858" cy="731520"/>
+          </a:xfrm>
+          <a:prstGeom prst="rect">
+            <a:avLst/>
+          </a:prstGeom>
+          <a:noFill/>
+        </p:spPr>
+        <p:txBody>
+          <a:bodyPr wrap="square" anchor="t" lIns="0" rIns="0" tIns="0" bIns="0">
+            <a:spAutoFit/>
+          </a:bodyPr>
+          <a:lstStyle/>
+          <a:p>
+            <a:pPr algn="l">
+              <a:lnSpc>
+                <a:spcPct val="130000"/>
+              </a:lnSpc>
+            </a:pPr>
+            <a:r>
+              <a:rPr sz="1500" b="1">
+                <a:solidFill>
+                  <a:srgbClr val="1C2A33"/>
+                </a:solidFill>
+                <a:latin typeface="楷体"/>
+                <a:ea typeface="楷体"/>
+                <a:cs typeface="楷体"/>
+              </a:rPr>
+              <a:t>分类标准选择。</a:t>
+            </a:r>
+          </a:p>
+        </p:txBody>
+      </p:sp>
+      <p:sp>
+        <p:nvSpPr>
+          <p:cNvPr id="10" name="TextBox 9"/>
+          <p:cNvSpPr txBox="1"/>
+          <p:nvPr/>
+        </p:nvSpPr>
+        <p:spPr>
+          <a:xfrm>
+            <a:off x="914400" y="3291840"/>
+            <a:ext cx="2814218" cy="2697480"/>
+          </a:xfrm>
+          <a:prstGeom prst="rect">
+            <a:avLst/>
+          </a:prstGeom>
+          <a:noFill/>
+        </p:spPr>
+        <p:txBody>
+          <a:bodyPr wrap="square" anchor="t" lIns="0" rIns="0" tIns="0" bIns="0">
+            <a:spAutoFit/>
+          </a:bodyPr>
+          <a:lstStyle/>
+          <a:p>
+            <a:pPr algn="l">
+              <a:lnSpc>
+                <a:spcPct val="150000"/>
+              </a:lnSpc>
+            </a:pPr>
+            <a:r>
+              <a:rPr sz="1350" b="0">
+                <a:solidFill>
+                  <a:srgbClr val="1C2A33"/>
+                </a:solidFill>
+                <a:latin typeface="楷体"/>
+                <a:ea typeface="楷体"/>
+                <a:cs typeface="楷体"/>
+              </a:rPr>
+              <a:t>原因：同一物质多标准归类易乱，需强调"按什么标准"。</a:t>
+            </a:r>
+          </a:p>
+        </p:txBody>
+      </p:sp>
+      <p:sp>
+        <p:nvSpPr>
+          <p:cNvPr id="11" name="Rounded Rectangle 10"/>
+          <p:cNvSpPr/>
+          <p:nvPr/>
+        </p:nvSpPr>
+        <p:spPr>
+          <a:xfrm>
+            <a:off x="4414418" y="2194560"/>
+            <a:ext cx="3362858" cy="4023360"/>
+          </a:xfrm>
+          <a:prstGeom prst="roundRect">
+            <a:avLst/>
+          </a:prstGeom>
+          <a:solidFill>
+            <a:srgbClr val="FFFFFF"/>
+          </a:solidFill>
+          <a:ln w="20320">
+            <a:solidFill>
+              <a:srgbClr val="B23A2A"/>
+            </a:solidFill>
+          </a:ln>
+          <a:effectLst/>
+        </p:spPr>
+        <p:style>
+          <a:lnRef idx="1">
+            <a:schemeClr val="accent1"/>
+          </a:lnRef>
+          <a:fillRef idx="3">
+            <a:schemeClr val="accent1"/>
+          </a:fillRef>
+          <a:effectRef idx="2">
+            <a:schemeClr val="accent1"/>
+          </a:effectRef>
+          <a:fontRef idx="minor">
+            <a:schemeClr val="lt1"/>
+          </a:fontRef>
+        </p:style>
+        <p:txBody>
+          <a:bodyPr rtlCol="0" anchor="ctr"/>
+          <a:lstStyle/>
+          <a:p>
+            <a:pPr algn="ctr"/>
+          </a:p>
+        </p:txBody>
+      </p:sp>
+      <p:sp>
+        <p:nvSpPr>
+          <p:cNvPr id="12" name="Oval 11"/>
+          <p:cNvSpPr/>
+          <p:nvPr/>
+        </p:nvSpPr>
+        <p:spPr>
+          <a:xfrm>
+            <a:off x="4670450" y="2468880"/>
+            <a:ext cx="548640" cy="548640"/>
+          </a:xfrm>
+          <a:prstGeom prst="ellipse">
             <a:avLst/>
           </a:prstGeom>
           <a:solidFill>
@@ -6768,14 +7349,133 @@
       </p:sp>
       <p:sp>
         <p:nvSpPr>
-          <p:cNvPr id="5" name="Rounded Rectangle 4"/>
+          <p:cNvPr id="13" name="TextBox 12"/>
+          <p:cNvSpPr txBox="1"/>
+          <p:nvPr/>
+        </p:nvSpPr>
+        <p:spPr>
+          <a:xfrm>
+            <a:off x="4670450" y="2523744"/>
+            <a:ext cx="548640" cy="438912"/>
+          </a:xfrm>
+          <a:prstGeom prst="rect">
+            <a:avLst/>
+          </a:prstGeom>
+          <a:noFill/>
+        </p:spPr>
+        <p:txBody>
+          <a:bodyPr wrap="square" anchor="t" lIns="0" rIns="0" tIns="0" bIns="0">
+            <a:spAutoFit/>
+          </a:bodyPr>
+          <a:lstStyle/>
+          <a:p>
+            <a:pPr algn="ctr"/>
+            <a:r>
+              <a:rPr sz="1800" b="1">
+                <a:solidFill>
+                  <a:srgbClr val="FFFFFF"/>
+                </a:solidFill>
+                <a:latin typeface="微软雅黑"/>
+                <a:ea typeface="微软雅黑"/>
+                <a:cs typeface="微软雅黑"/>
+              </a:rPr>
+              <a:t>2</a:t>
+            </a:r>
+          </a:p>
+        </p:txBody>
+      </p:sp>
+      <p:sp>
+        <p:nvSpPr>
+          <p:cNvPr id="14" name="TextBox 13"/>
+          <p:cNvSpPr txBox="1"/>
+          <p:nvPr/>
+        </p:nvSpPr>
+        <p:spPr>
+          <a:xfrm>
+            <a:off x="5374538" y="2487168"/>
+            <a:ext cx="2219858" cy="731520"/>
+          </a:xfrm>
+          <a:prstGeom prst="rect">
+            <a:avLst/>
+          </a:prstGeom>
+          <a:noFill/>
+        </p:spPr>
+        <p:txBody>
+          <a:bodyPr wrap="square" anchor="t" lIns="0" rIns="0" tIns="0" bIns="0">
+            <a:spAutoFit/>
+          </a:bodyPr>
+          <a:lstStyle/>
+          <a:p>
+            <a:pPr algn="l">
+              <a:lnSpc>
+                <a:spcPct val="130000"/>
+              </a:lnSpc>
+            </a:pPr>
+            <a:r>
+              <a:rPr sz="1500" b="1">
+                <a:solidFill>
+                  <a:srgbClr val="1C2A33"/>
+                </a:solidFill>
+                <a:latin typeface="楷体"/>
+                <a:ea typeface="楷体"/>
+                <a:cs typeface="楷体"/>
+              </a:rPr>
+              <a:t>胶体本质。</a:t>
+            </a:r>
+          </a:p>
+        </p:txBody>
+      </p:sp>
+      <p:sp>
+        <p:nvSpPr>
+          <p:cNvPr id="15" name="TextBox 14"/>
+          <p:cNvSpPr txBox="1"/>
+          <p:nvPr/>
+        </p:nvSpPr>
+        <p:spPr>
+          <a:xfrm>
+            <a:off x="4688738" y="3291840"/>
+            <a:ext cx="2814218" cy="2697480"/>
+          </a:xfrm>
+          <a:prstGeom prst="rect">
+            <a:avLst/>
+          </a:prstGeom>
+          <a:noFill/>
+        </p:spPr>
+        <p:txBody>
+          <a:bodyPr wrap="square" anchor="t" lIns="0" rIns="0" tIns="0" bIns="0">
+            <a:spAutoFit/>
+          </a:bodyPr>
+          <a:lstStyle/>
+          <a:p>
+            <a:pPr algn="l">
+              <a:lnSpc>
+                <a:spcPct val="150000"/>
+              </a:lnSpc>
+            </a:pPr>
+            <a:r>
+              <a:rPr sz="1350" b="0">
+                <a:solidFill>
+                  <a:srgbClr val="1C2A33"/>
+                </a:solidFill>
+                <a:latin typeface="楷体"/>
+                <a:ea typeface="楷体"/>
+                <a:cs typeface="楷体"/>
+              </a:rPr>
+              <a:t>原因：易把丁达尔当成本质，本质在粒子直径，需澄清。</a:t>
+            </a:r>
+          </a:p>
+        </p:txBody>
+      </p:sp>
+      <p:sp>
+        <p:nvSpPr>
+          <p:cNvPr id="16" name="Rounded Rectangle 15"/>
           <p:cNvSpPr/>
           <p:nvPr/>
         </p:nvSpPr>
         <p:spPr>
           <a:xfrm>
-            <a:off x="640080" y="1417320"/>
-            <a:ext cx="5349240" cy="2057400"/>
+            <a:off x="8188756" y="2194560"/>
+            <a:ext cx="3362858" cy="4023360"/>
           </a:xfrm>
           <a:prstGeom prst="roundRect">
             <a:avLst/>
@@ -6783,9 +7483,9 @@
           <a:solidFill>
             <a:srgbClr val="FFFFFF"/>
           </a:solidFill>
-          <a:ln w="22860">
+          <a:ln w="20320">
             <a:solidFill>
-              <a:srgbClr val="B23A2A"/>
+              <a:srgbClr val="2E7D6B"/>
             </a:solidFill>
           </a:ln>
           <a:effectLst/>
@@ -6814,20 +7514,20 @@
       </p:sp>
       <p:sp>
         <p:nvSpPr>
-          <p:cNvPr id="6" name="Oval 5"/>
+          <p:cNvPr id="17" name="Oval 16"/>
           <p:cNvSpPr/>
           <p:nvPr/>
         </p:nvSpPr>
         <p:spPr>
           <a:xfrm>
-            <a:off x="804672" y="1581912"/>
-            <a:ext cx="457200" cy="457200"/>
+            <a:off x="8444788" y="2468880"/>
+            <a:ext cx="548640" cy="548640"/>
           </a:xfrm>
           <a:prstGeom prst="ellipse">
             <a:avLst/>
           </a:prstGeom>
           <a:solidFill>
-            <a:srgbClr val="B23A2A"/>
+            <a:srgbClr val="2E7D6B"/>
           </a:solidFill>
           <a:ln>
             <a:noFill/>
@@ -6858,14 +7558,14 @@
       </p:sp>
       <p:sp>
         <p:nvSpPr>
-          <p:cNvPr id="7" name="TextBox 6"/>
+          <p:cNvPr id="18" name="TextBox 17"/>
           <p:cNvSpPr txBox="1"/>
           <p:nvPr/>
         </p:nvSpPr>
         <p:spPr>
           <a:xfrm>
-            <a:off x="804672" y="1636776"/>
-            <a:ext cx="457200" cy="384048"/>
+            <a:off x="8444788" y="2523744"/>
+            <a:ext cx="548640" cy="438912"/>
           </a:xfrm>
           <a:prstGeom prst="rect">
             <a:avLst/>
@@ -6880,7 +7580,7 @@
           <a:p>
             <a:pPr algn="ctr"/>
             <a:r>
-              <a:rPr sz="1600" b="1">
+              <a:rPr sz="1800" b="1">
                 <a:solidFill>
                   <a:srgbClr val="FFFFFF"/>
                 </a:solidFill>
@@ -6888,21 +7588,21 @@
                 <a:ea typeface="微软雅黑"/>
                 <a:cs typeface="微软雅黑"/>
               </a:rPr>
-              <a:t>!</a:t>
-            </a:r>
-          </a:p>
-        </p:txBody>
-      </p:sp>
-      <p:sp>
-        <p:nvSpPr>
-          <p:cNvPr id="8" name="TextBox 7"/>
+              <a:t>3</a:t>
+            </a:r>
+          </a:p>
+        </p:txBody>
+      </p:sp>
+      <p:sp>
+        <p:nvSpPr>
+          <p:cNvPr id="19" name="TextBox 18"/>
           <p:cNvSpPr txBox="1"/>
           <p:nvPr/>
         </p:nvSpPr>
         <p:spPr>
           <a:xfrm>
-            <a:off x="1371600" y="1527048"/>
-            <a:ext cx="4434840" cy="457200"/>
+            <a:off x="9148876" y="2487168"/>
+            <a:ext cx="2219858" cy="731520"/>
           </a:xfrm>
           <a:prstGeom prst="rect">
             <a:avLst/>
@@ -6917,52 +7617,11 @@
           <a:p>
             <a:pPr algn="l">
               <a:lnSpc>
-                <a:spcPct val="110000"/>
+                <a:spcPct val="130000"/>
               </a:lnSpc>
             </a:pPr>
             <a:r>
-              <a:rPr sz="1600" b="1">
-                <a:solidFill>
-                  <a:srgbClr val="1C2A33"/>
-                </a:solidFill>
-                <a:latin typeface="微软雅黑"/>
-                <a:ea typeface="微软雅黑"/>
-                <a:cs typeface="微软雅黑"/>
-              </a:rPr>
-              <a:t/>
-            </a:r>
-          </a:p>
-        </p:txBody>
-      </p:sp>
-      <p:sp>
-        <p:nvSpPr>
-          <p:cNvPr id="9" name="TextBox 8"/>
-          <p:cNvSpPr txBox="1"/>
-          <p:nvPr/>
-        </p:nvSpPr>
-        <p:spPr>
-          <a:xfrm>
-            <a:off x="1371600" y="1965960"/>
-            <a:ext cx="4434840" cy="1417320"/>
-          </a:xfrm>
-          <a:prstGeom prst="rect">
-            <a:avLst/>
-          </a:prstGeom>
-          <a:noFill/>
-        </p:spPr>
-        <p:txBody>
-          <a:bodyPr wrap="square" anchor="t" lIns="0" rIns="0" tIns="0" bIns="0">
-            <a:spAutoFit/>
-          </a:bodyPr>
-          <a:lstStyle/>
-          <a:p>
-            <a:pPr algn="l">
-              <a:lnSpc>
-                <a:spcPct val="128000"/>
-              </a:lnSpc>
-            </a:pPr>
-            <a:r>
-              <a:rPr sz="1400" b="0">
+              <a:rPr sz="1500" b="1">
                 <a:solidFill>
                   <a:srgbClr val="1C2A33"/>
                 </a:solidFill>
@@ -6970,111 +7629,21 @@
                 <a:ea typeface="楷体"/>
                 <a:cs typeface="楷体"/>
               </a:rPr>
-              <a:t>① 分类标准选择。原因：同一物质多标准归类易乱，需强调"按什么标准"。</a:t>
-            </a:r>
-          </a:p>
-        </p:txBody>
-      </p:sp>
-      <p:sp>
-        <p:nvSpPr>
-          <p:cNvPr id="10" name="Rounded Rectangle 9"/>
-          <p:cNvSpPr/>
-          <p:nvPr/>
-        </p:nvSpPr>
-        <p:spPr>
-          <a:xfrm>
-            <a:off x="6263640" y="1417320"/>
-            <a:ext cx="5349240" cy="2057400"/>
-          </a:xfrm>
-          <a:prstGeom prst="roundRect">
-            <a:avLst/>
-          </a:prstGeom>
-          <a:solidFill>
-            <a:srgbClr val="FFFFFF"/>
-          </a:solidFill>
-          <a:ln w="22860">
-            <a:solidFill>
-              <a:srgbClr val="B23A2A"/>
-            </a:solidFill>
-          </a:ln>
-          <a:effectLst/>
-        </p:spPr>
-        <p:style>
-          <a:lnRef idx="1">
-            <a:schemeClr val="accent1"/>
-          </a:lnRef>
-          <a:fillRef idx="3">
-            <a:schemeClr val="accent1"/>
-          </a:fillRef>
-          <a:effectRef idx="2">
-            <a:schemeClr val="accent1"/>
-          </a:effectRef>
-          <a:fontRef idx="minor">
-            <a:schemeClr val="lt1"/>
-          </a:fontRef>
-        </p:style>
-        <p:txBody>
-          <a:bodyPr rtlCol="0" anchor="ctr"/>
-          <a:lstStyle/>
-          <a:p>
-            <a:pPr algn="ctr"/>
-          </a:p>
-        </p:txBody>
-      </p:sp>
-      <p:sp>
-        <p:nvSpPr>
-          <p:cNvPr id="11" name="Oval 10"/>
-          <p:cNvSpPr/>
-          <p:nvPr/>
-        </p:nvSpPr>
-        <p:spPr>
-          <a:xfrm>
-            <a:off x="6428232" y="1581912"/>
-            <a:ext cx="457200" cy="457200"/>
-          </a:xfrm>
-          <a:prstGeom prst="ellipse">
-            <a:avLst/>
-          </a:prstGeom>
-          <a:solidFill>
-            <a:srgbClr val="B23A2A"/>
-          </a:solidFill>
-          <a:ln>
-            <a:noFill/>
-          </a:ln>
-          <a:effectLst/>
-        </p:spPr>
-        <p:style>
-          <a:lnRef idx="1">
-            <a:schemeClr val="accent1"/>
-          </a:lnRef>
-          <a:fillRef idx="3">
-            <a:schemeClr val="accent1"/>
-          </a:fillRef>
-          <a:effectRef idx="2">
-            <a:schemeClr val="accent1"/>
-          </a:effectRef>
-          <a:fontRef idx="minor">
-            <a:schemeClr val="lt1"/>
-          </a:fontRef>
-        </p:style>
-        <p:txBody>
-          <a:bodyPr rtlCol="0" anchor="ctr"/>
-          <a:lstStyle/>
-          <a:p>
-            <a:pPr algn="ctr"/>
-          </a:p>
-        </p:txBody>
-      </p:sp>
-      <p:sp>
-        <p:nvSpPr>
-          <p:cNvPr id="12" name="TextBox 11"/>
+              <a:t>浊液与胶体。</a:t>
+            </a:r>
+          </a:p>
+        </p:txBody>
+      </p:sp>
+      <p:sp>
+        <p:nvSpPr>
+          <p:cNvPr id="20" name="TextBox 19"/>
           <p:cNvSpPr txBox="1"/>
           <p:nvPr/>
         </p:nvSpPr>
         <p:spPr>
           <a:xfrm>
-            <a:off x="6428232" y="1636776"/>
-            <a:ext cx="457200" cy="384048"/>
+            <a:off x="8463076" y="3291840"/>
+            <a:ext cx="2814218" cy="2697480"/>
           </a:xfrm>
           <a:prstGeom prst="rect">
             <a:avLst/>
@@ -7087,91 +7656,13 @@
           </a:bodyPr>
           <a:lstStyle/>
           <a:p>
-            <a:pPr algn="ctr"/>
-            <a:r>
-              <a:rPr sz="1600" b="1">
-                <a:solidFill>
-                  <a:srgbClr val="FFFFFF"/>
-                </a:solidFill>
-                <a:latin typeface="微软雅黑"/>
-                <a:ea typeface="微软雅黑"/>
-                <a:cs typeface="微软雅黑"/>
-              </a:rPr>
-              <a:t>!</a:t>
-            </a:r>
-          </a:p>
-        </p:txBody>
-      </p:sp>
-      <p:sp>
-        <p:nvSpPr>
-          <p:cNvPr id="13" name="TextBox 12"/>
-          <p:cNvSpPr txBox="1"/>
-          <p:nvPr/>
-        </p:nvSpPr>
-        <p:spPr>
-          <a:xfrm>
-            <a:off x="6995160" y="1527048"/>
-            <a:ext cx="4434840" cy="457200"/>
-          </a:xfrm>
-          <a:prstGeom prst="rect">
-            <a:avLst/>
-          </a:prstGeom>
-          <a:noFill/>
-        </p:spPr>
-        <p:txBody>
-          <a:bodyPr wrap="square" anchor="t" lIns="0" rIns="0" tIns="0" bIns="0">
-            <a:spAutoFit/>
-          </a:bodyPr>
-          <a:lstStyle/>
-          <a:p>
             <a:pPr algn="l">
               <a:lnSpc>
-                <a:spcPct val="110000"/>
+                <a:spcPct val="150000"/>
               </a:lnSpc>
             </a:pPr>
             <a:r>
-              <a:rPr sz="1600" b="1">
-                <a:solidFill>
-                  <a:srgbClr val="1C2A33"/>
-                </a:solidFill>
-                <a:latin typeface="微软雅黑"/>
-                <a:ea typeface="微软雅黑"/>
-                <a:cs typeface="微软雅黑"/>
-              </a:rPr>
-              <a:t/>
-            </a:r>
-          </a:p>
-        </p:txBody>
-      </p:sp>
-      <p:sp>
-        <p:nvSpPr>
-          <p:cNvPr id="14" name="TextBox 13"/>
-          <p:cNvSpPr txBox="1"/>
-          <p:nvPr/>
-        </p:nvSpPr>
-        <p:spPr>
-          <a:xfrm>
-            <a:off x="6995160" y="1965960"/>
-            <a:ext cx="4434840" cy="1417320"/>
-          </a:xfrm>
-          <a:prstGeom prst="rect">
-            <a:avLst/>
-          </a:prstGeom>
-          <a:noFill/>
-        </p:spPr>
-        <p:txBody>
-          <a:bodyPr wrap="square" anchor="t" lIns="0" rIns="0" tIns="0" bIns="0">
-            <a:spAutoFit/>
-          </a:bodyPr>
-          <a:lstStyle/>
-          <a:p>
-            <a:pPr algn="l">
-              <a:lnSpc>
-                <a:spcPct val="128000"/>
-              </a:lnSpc>
-            </a:pPr>
-            <a:r>
-              <a:rPr sz="1400" b="0">
+              <a:rPr sz="1350" b="0">
                 <a:solidFill>
                   <a:srgbClr val="1C2A33"/>
                 </a:solidFill>
@@ -7179,223 +7670,14 @@
                 <a:ea typeface="楷体"/>
                 <a:cs typeface="楷体"/>
               </a:rPr>
-              <a:t>② 胶体本质。原因：易把丁达尔当成本质，本质在粒子直径，需澄清。</a:t>
-            </a:r>
-          </a:p>
-        </p:txBody>
-      </p:sp>
-      <p:sp>
-        <p:nvSpPr>
-          <p:cNvPr id="15" name="Rounded Rectangle 14"/>
-          <p:cNvSpPr/>
-          <p:nvPr/>
-        </p:nvSpPr>
-        <p:spPr>
-          <a:xfrm>
-            <a:off x="640080" y="3703320"/>
-            <a:ext cx="5349240" cy="2057400"/>
-          </a:xfrm>
-          <a:prstGeom prst="roundRect">
-            <a:avLst/>
-          </a:prstGeom>
-          <a:solidFill>
-            <a:srgbClr val="FFFFFF"/>
-          </a:solidFill>
-          <a:ln w="22860">
-            <a:solidFill>
-              <a:srgbClr val="B23A2A"/>
-            </a:solidFill>
-          </a:ln>
-          <a:effectLst/>
-        </p:spPr>
-        <p:style>
-          <a:lnRef idx="1">
-            <a:schemeClr val="accent1"/>
-          </a:lnRef>
-          <a:fillRef idx="3">
-            <a:schemeClr val="accent1"/>
-          </a:fillRef>
-          <a:effectRef idx="2">
-            <a:schemeClr val="accent1"/>
-          </a:effectRef>
-          <a:fontRef idx="minor">
-            <a:schemeClr val="lt1"/>
-          </a:fontRef>
-        </p:style>
-        <p:txBody>
-          <a:bodyPr rtlCol="0" anchor="ctr"/>
-          <a:lstStyle/>
-          <a:p>
-            <a:pPr algn="ctr"/>
-          </a:p>
-        </p:txBody>
-      </p:sp>
-      <p:sp>
-        <p:nvSpPr>
-          <p:cNvPr id="16" name="Oval 15"/>
-          <p:cNvSpPr/>
-          <p:nvPr/>
-        </p:nvSpPr>
-        <p:spPr>
-          <a:xfrm>
-            <a:off x="804672" y="3867912"/>
-            <a:ext cx="457200" cy="457200"/>
-          </a:xfrm>
-          <a:prstGeom prst="ellipse">
-            <a:avLst/>
-          </a:prstGeom>
-          <a:solidFill>
-            <a:srgbClr val="B23A2A"/>
-          </a:solidFill>
-          <a:ln>
-            <a:noFill/>
-          </a:ln>
-          <a:effectLst/>
-        </p:spPr>
-        <p:style>
-          <a:lnRef idx="1">
-            <a:schemeClr val="accent1"/>
-          </a:lnRef>
-          <a:fillRef idx="3">
-            <a:schemeClr val="accent1"/>
-          </a:fillRef>
-          <a:effectRef idx="2">
-            <a:schemeClr val="accent1"/>
-          </a:effectRef>
-          <a:fontRef idx="minor">
-            <a:schemeClr val="lt1"/>
-          </a:fontRef>
-        </p:style>
-        <p:txBody>
-          <a:bodyPr rtlCol="0" anchor="ctr"/>
-          <a:lstStyle/>
-          <a:p>
-            <a:pPr algn="ctr"/>
-          </a:p>
-        </p:txBody>
-      </p:sp>
-      <p:sp>
-        <p:nvSpPr>
-          <p:cNvPr id="17" name="TextBox 16"/>
-          <p:cNvSpPr txBox="1"/>
-          <p:nvPr/>
-        </p:nvSpPr>
-        <p:spPr>
-          <a:xfrm>
-            <a:off x="804672" y="3922776"/>
-            <a:ext cx="457200" cy="384048"/>
-          </a:xfrm>
-          <a:prstGeom prst="rect">
-            <a:avLst/>
-          </a:prstGeom>
-          <a:noFill/>
-        </p:spPr>
-        <p:txBody>
-          <a:bodyPr wrap="square" anchor="t" lIns="0" rIns="0" tIns="0" bIns="0">
-            <a:spAutoFit/>
-          </a:bodyPr>
-          <a:lstStyle/>
-          <a:p>
-            <a:pPr algn="ctr"/>
-            <a:r>
-              <a:rPr sz="1600" b="1">
-                <a:solidFill>
-                  <a:srgbClr val="FFFFFF"/>
-                </a:solidFill>
-                <a:latin typeface="微软雅黑"/>
-                <a:ea typeface="微软雅黑"/>
-                <a:cs typeface="微软雅黑"/>
-              </a:rPr>
-              <a:t>!</a:t>
-            </a:r>
-          </a:p>
-        </p:txBody>
-      </p:sp>
-      <p:sp>
-        <p:nvSpPr>
-          <p:cNvPr id="18" name="TextBox 17"/>
-          <p:cNvSpPr txBox="1"/>
-          <p:nvPr/>
-        </p:nvSpPr>
-        <p:spPr>
-          <a:xfrm>
-            <a:off x="1371600" y="3813048"/>
-            <a:ext cx="4434840" cy="457200"/>
-          </a:xfrm>
-          <a:prstGeom prst="rect">
-            <a:avLst/>
-          </a:prstGeom>
-          <a:noFill/>
-        </p:spPr>
-        <p:txBody>
-          <a:bodyPr wrap="square" anchor="t" lIns="0" rIns="0" tIns="0" bIns="0">
-            <a:spAutoFit/>
-          </a:bodyPr>
-          <a:lstStyle/>
-          <a:p>
-            <a:pPr algn="l">
-              <a:lnSpc>
-                <a:spcPct val="110000"/>
-              </a:lnSpc>
-            </a:pPr>
-            <a:r>
-              <a:rPr sz="1600" b="1">
-                <a:solidFill>
-                  <a:srgbClr val="1C2A33"/>
-                </a:solidFill>
-                <a:latin typeface="微软雅黑"/>
-                <a:ea typeface="微软雅黑"/>
-                <a:cs typeface="微软雅黑"/>
-              </a:rPr>
-              <a:t/>
-            </a:r>
-          </a:p>
-        </p:txBody>
-      </p:sp>
-      <p:sp>
-        <p:nvSpPr>
-          <p:cNvPr id="19" name="TextBox 18"/>
-          <p:cNvSpPr txBox="1"/>
-          <p:nvPr/>
-        </p:nvSpPr>
-        <p:spPr>
-          <a:xfrm>
-            <a:off x="1371600" y="4251960"/>
-            <a:ext cx="4434840" cy="1417320"/>
-          </a:xfrm>
-          <a:prstGeom prst="rect">
-            <a:avLst/>
-          </a:prstGeom>
-          <a:noFill/>
-        </p:spPr>
-        <p:txBody>
-          <a:bodyPr wrap="square" anchor="t" lIns="0" rIns="0" tIns="0" bIns="0">
-            <a:spAutoFit/>
-          </a:bodyPr>
-          <a:lstStyle/>
-          <a:p>
-            <a:pPr algn="l">
-              <a:lnSpc>
-                <a:spcPct val="128000"/>
-              </a:lnSpc>
-            </a:pPr>
-            <a:r>
-              <a:rPr sz="1400" b="0">
-                <a:solidFill>
-                  <a:srgbClr val="1C2A33"/>
-                </a:solidFill>
-                <a:latin typeface="楷体"/>
-                <a:ea typeface="楷体"/>
-                <a:cs typeface="楷体"/>
-              </a:rPr>
-              <a:t>③ 浊液与胶体。原因：外观相似，需借半透膜/丁达尔区分。</a:t>
-            </a:r>
-          </a:p>
-        </p:txBody>
-      </p:sp>
-      <p:sp>
-        <p:nvSpPr>
-          <p:cNvPr id="20" name="TextBox 19"/>
+              <a:t>原因：外观相似，需借半透膜/丁达尔区分。</a:t>
+            </a:r>
+          </a:p>
+        </p:txBody>
+      </p:sp>
+      <p:sp>
+        <p:nvSpPr>
+          <p:cNvPr id="21" name="TextBox 20"/>
           <p:cNvSpPr txBox="1"/>
           <p:nvPr/>
         </p:nvSpPr>
@@ -7522,13 +7804,13 @@
             <a:r>
               <a:rPr sz="1300" b="1">
                 <a:solidFill>
-                  <a:srgbClr val="C8A86B"/>
+                  <a:srgbClr val="B23A2A"/>
                 </a:solidFill>
                 <a:latin typeface="微软雅黑"/>
                 <a:ea typeface="微软雅黑"/>
                 <a:cs typeface="微软雅黑"/>
               </a:rPr>
-              <a:t>要点板书</a:t>
+              <a:t>板书精华</a:t>
             </a:r>
           </a:p>
         </p:txBody>
@@ -7548,7 +7830,7 @@
             <a:avLst/>
           </a:prstGeom>
           <a:solidFill>
-            <a:srgbClr val="C8A86B"/>
+            <a:srgbClr val="B23A2A"/>
           </a:solidFill>
           <a:ln>
             <a:noFill/>
@@ -7585,19 +7867,17 @@
         </p:nvSpPr>
         <p:spPr>
           <a:xfrm>
-            <a:off x="640080" y="1417320"/>
-            <a:ext cx="10911535" cy="5394960"/>
+            <a:off x="640080" y="1920240"/>
+            <a:ext cx="10911535" cy="4572000"/>
           </a:xfrm>
           <a:prstGeom prst="roundRect">
             <a:avLst/>
           </a:prstGeom>
           <a:solidFill>
-            <a:srgbClr val="FFFFFF"/>
+            <a:srgbClr val="1C2A33"/>
           </a:solidFill>
-          <a:ln w="25400">
-            <a:solidFill>
-              <a:srgbClr val="C8A86B"/>
-            </a:solidFill>
+          <a:ln>
+            <a:noFill/>
           </a:ln>
           <a:effectLst/>
         </p:spPr>
@@ -7631,8 +7911,8 @@
         </p:nvSpPr>
         <p:spPr>
           <a:xfrm>
-            <a:off x="914400" y="1554480"/>
-            <a:ext cx="10362895" cy="5120640"/>
+            <a:off x="1005840" y="2103120"/>
+            <a:ext cx="10180015" cy="548640"/>
           </a:xfrm>
           <a:prstGeom prst="rect">
             <a:avLst/>
@@ -7645,42 +7925,257 @@
           </a:bodyPr>
           <a:lstStyle/>
           <a:p>
+            <a:pPr algn="l"/>
+            <a:r>
+              <a:rPr sz="2000" b="1">
+                <a:solidFill>
+                  <a:srgbClr val="C8A86B"/>
+                </a:solidFill>
+                <a:latin typeface="楷体"/>
+                <a:ea typeface="楷体"/>
+                <a:cs typeface="楷体"/>
+              </a:rPr>
+              <a:t>《物质的分类》要点</a:t>
+            </a:r>
+          </a:p>
+        </p:txBody>
+      </p:sp>
+      <p:sp>
+        <p:nvSpPr>
+          <p:cNvPr id="7" name="TextBox 6"/>
+          <p:cNvSpPr txBox="1"/>
+          <p:nvPr/>
+        </p:nvSpPr>
+        <p:spPr>
+          <a:xfrm>
+            <a:off x="1005840" y="2743200"/>
+            <a:ext cx="10180015" cy="3566160"/>
+          </a:xfrm>
+          <a:prstGeom prst="rect">
+            <a:avLst/>
+          </a:prstGeom>
+          <a:noFill/>
+        </p:spPr>
+        <p:txBody>
+          <a:bodyPr wrap="square" anchor="t" lIns="0" rIns="0" tIns="0" bIns="0">
+            <a:spAutoFit/>
+          </a:bodyPr>
+          <a:lstStyle/>
+          <a:p>
             <a:pPr algn="l">
               <a:lnSpc>
-                <a:spcPct val="110000"/>
+                <a:spcPct val="145000"/>
               </a:lnSpc>
               <a:spcAft>
-                <a:spcPts val="100"/>
+                <a:spcPts val="600"/>
               </a:spcAft>
             </a:pPr>
             <a:r>
-              <a:rPr sz="1300" b="0">
-                <a:solidFill>
-                  <a:srgbClr val="1C2A33"/>
-                </a:solidFill>
-                <a:latin typeface="微软雅黑"/>
-                <a:ea typeface="微软雅黑"/>
-                <a:cs typeface="微软雅黑"/>
+              <a:rPr sz="1600" b="0">
+                <a:solidFill>
+                  <a:srgbClr val="FFFFFF"/>
+                </a:solidFill>
+                <a:latin typeface="楷体"/>
+                <a:ea typeface="楷体"/>
+                <a:cs typeface="楷体"/>
               </a:rPr>
-              <a:t>┌── 物质的分类 ──┐
-│ 交叉分类: │
-│ Na2CO3=钠盐+碳酸盐│
-│ 树状: 纯净物→ │
-│ 单质/化合物→ │
-│ 酸碱盐氧化物 │
-│ 分散系(粒子直径) │
-│ 溶液&lt;1nm │
-│ 胶体1-100nm │
-│ 浊液&gt;100nm │
-│ 胶体:丁达尔效应 │
-└────────────────┘</a:t>
-            </a:r>
-          </a:p>
-        </p:txBody>
-      </p:sp>
-      <p:sp>
-        <p:nvSpPr>
-          <p:cNvPr id="7" name="TextBox 6"/>
+              <a:t>交叉分类:</a:t>
+            </a:r>
+          </a:p>
+          <a:p>
+            <a:pPr algn="l">
+              <a:lnSpc>
+                <a:spcPct val="145000"/>
+              </a:lnSpc>
+              <a:spcAft>
+                <a:spcPts val="600"/>
+              </a:spcAft>
+            </a:pPr>
+            <a:r>
+              <a:rPr sz="1600" b="0">
+                <a:solidFill>
+                  <a:srgbClr val="FFFFFF"/>
+                </a:solidFill>
+                <a:latin typeface="楷体"/>
+                <a:ea typeface="楷体"/>
+                <a:cs typeface="楷体"/>
+              </a:rPr>
+              <a:t>Na2CO3=钠盐+碳酸盐</a:t>
+            </a:r>
+          </a:p>
+          <a:p>
+            <a:pPr algn="l">
+              <a:lnSpc>
+                <a:spcPct val="145000"/>
+              </a:lnSpc>
+              <a:spcAft>
+                <a:spcPts val="600"/>
+              </a:spcAft>
+            </a:pPr>
+            <a:r>
+              <a:rPr sz="1600" b="0">
+                <a:solidFill>
+                  <a:srgbClr val="FFFFFF"/>
+                </a:solidFill>
+                <a:latin typeface="楷体"/>
+                <a:ea typeface="楷体"/>
+                <a:cs typeface="楷体"/>
+              </a:rPr>
+              <a:t>树状: 纯净物→</a:t>
+            </a:r>
+          </a:p>
+          <a:p>
+            <a:pPr algn="l">
+              <a:lnSpc>
+                <a:spcPct val="145000"/>
+              </a:lnSpc>
+              <a:spcAft>
+                <a:spcPts val="600"/>
+              </a:spcAft>
+            </a:pPr>
+            <a:r>
+              <a:rPr sz="1600" b="0">
+                <a:solidFill>
+                  <a:srgbClr val="FFFFFF"/>
+                </a:solidFill>
+                <a:latin typeface="楷体"/>
+                <a:ea typeface="楷体"/>
+                <a:cs typeface="楷体"/>
+              </a:rPr>
+              <a:t>单质/化合物→</a:t>
+            </a:r>
+          </a:p>
+          <a:p>
+            <a:pPr algn="l">
+              <a:lnSpc>
+                <a:spcPct val="145000"/>
+              </a:lnSpc>
+              <a:spcAft>
+                <a:spcPts val="600"/>
+              </a:spcAft>
+            </a:pPr>
+            <a:r>
+              <a:rPr sz="1600" b="0">
+                <a:solidFill>
+                  <a:srgbClr val="FFFFFF"/>
+                </a:solidFill>
+                <a:latin typeface="楷体"/>
+                <a:ea typeface="楷体"/>
+                <a:cs typeface="楷体"/>
+              </a:rPr>
+              <a:t>酸碱盐氧化物</a:t>
+            </a:r>
+          </a:p>
+          <a:p>
+            <a:pPr algn="l">
+              <a:lnSpc>
+                <a:spcPct val="145000"/>
+              </a:lnSpc>
+              <a:spcAft>
+                <a:spcPts val="600"/>
+              </a:spcAft>
+            </a:pPr>
+            <a:r>
+              <a:rPr sz="1600" b="0">
+                <a:solidFill>
+                  <a:srgbClr val="FFFFFF"/>
+                </a:solidFill>
+                <a:latin typeface="楷体"/>
+                <a:ea typeface="楷体"/>
+                <a:cs typeface="楷体"/>
+              </a:rPr>
+              <a:t>分散系(粒子直径)</a:t>
+            </a:r>
+          </a:p>
+          <a:p>
+            <a:pPr algn="l">
+              <a:lnSpc>
+                <a:spcPct val="145000"/>
+              </a:lnSpc>
+              <a:spcAft>
+                <a:spcPts val="600"/>
+              </a:spcAft>
+            </a:pPr>
+            <a:r>
+              <a:rPr sz="1600" b="0">
+                <a:solidFill>
+                  <a:srgbClr val="FFFFFF"/>
+                </a:solidFill>
+                <a:latin typeface="楷体"/>
+                <a:ea typeface="楷体"/>
+                <a:cs typeface="楷体"/>
+              </a:rPr>
+              <a:t>溶液&lt;1nm</a:t>
+            </a:r>
+          </a:p>
+          <a:p>
+            <a:pPr algn="l">
+              <a:lnSpc>
+                <a:spcPct val="145000"/>
+              </a:lnSpc>
+              <a:spcAft>
+                <a:spcPts val="600"/>
+              </a:spcAft>
+            </a:pPr>
+            <a:r>
+              <a:rPr sz="1600" b="0">
+                <a:solidFill>
+                  <a:srgbClr val="FFFFFF"/>
+                </a:solidFill>
+                <a:latin typeface="楷体"/>
+                <a:ea typeface="楷体"/>
+                <a:cs typeface="楷体"/>
+              </a:rPr>
+              <a:t>胶体1-100nm</a:t>
+            </a:r>
+          </a:p>
+          <a:p>
+            <a:pPr algn="l">
+              <a:lnSpc>
+                <a:spcPct val="145000"/>
+              </a:lnSpc>
+              <a:spcAft>
+                <a:spcPts val="600"/>
+              </a:spcAft>
+            </a:pPr>
+            <a:r>
+              <a:rPr sz="1600" b="0">
+                <a:solidFill>
+                  <a:srgbClr val="FFFFFF"/>
+                </a:solidFill>
+                <a:latin typeface="楷体"/>
+                <a:ea typeface="楷体"/>
+                <a:cs typeface="楷体"/>
+              </a:rPr>
+              <a:t>浊液&gt;100nm</a:t>
+            </a:r>
+          </a:p>
+          <a:p>
+            <a:pPr algn="l">
+              <a:lnSpc>
+                <a:spcPct val="145000"/>
+              </a:lnSpc>
+              <a:spcAft>
+                <a:spcPts val="600"/>
+              </a:spcAft>
+            </a:pPr>
+            <a:r>
+              <a:rPr sz="1600" b="0">
+                <a:solidFill>
+                  <a:srgbClr val="FFFFFF"/>
+                </a:solidFill>
+                <a:latin typeface="楷体"/>
+                <a:ea typeface="楷体"/>
+                <a:cs typeface="楷体"/>
+              </a:rPr>
+              <a:t>胶体:丁达尔效应</a:t>
+            </a:r>
+          </a:p>
+        </p:txBody>
+      </p:sp>
+      <p:sp>
+        <p:nvSpPr>
+          <p:cNvPr id="8" name="TextBox 7"/>
           <p:cNvSpPr txBox="1"/>
           <p:nvPr/>
         </p:nvSpPr>
@@ -7807,13 +8302,13 @@
             <a:r>
               <a:rPr sz="1300" b="1">
                 <a:solidFill>
-                  <a:srgbClr val="2E7D6B"/>
+                  <a:srgbClr val="B23A2A"/>
                 </a:solidFill>
                 <a:latin typeface="微软雅黑"/>
                 <a:ea typeface="微软雅黑"/>
                 <a:cs typeface="微软雅黑"/>
               </a:rPr>
-              <a:t>分层作业</a:t>
+              <a:t>作业</a:t>
             </a:r>
           </a:p>
         </p:txBody>
@@ -7833,7 +8328,7 @@
             <a:avLst/>
           </a:prstGeom>
           <a:solidFill>
-            <a:srgbClr val="2E7D6B"/>
+            <a:srgbClr val="B23A2A"/>
           </a:solidFill>
           <a:ln>
             <a:noFill/>
@@ -7864,14 +8359,51 @@
       </p:sp>
       <p:sp>
         <p:nvSpPr>
-          <p:cNvPr id="5" name="Rounded Rectangle 4"/>
+          <p:cNvPr id="5" name="TextBox 4"/>
+          <p:cNvSpPr txBox="1"/>
+          <p:nvPr/>
+        </p:nvSpPr>
+        <p:spPr>
+          <a:xfrm>
+            <a:off x="640080" y="1325880"/>
+            <a:ext cx="10058400" cy="548640"/>
+          </a:xfrm>
+          <a:prstGeom prst="rect">
+            <a:avLst/>
+          </a:prstGeom>
+          <a:noFill/>
+        </p:spPr>
+        <p:txBody>
+          <a:bodyPr wrap="square" anchor="t" lIns="0" rIns="0" tIns="0" bIns="0">
+            <a:spAutoFit/>
+          </a:bodyPr>
+          <a:lstStyle/>
+          <a:p>
+            <a:pPr algn="l"/>
+            <a:r>
+              <a:rPr sz="2800" b="1">
+                <a:solidFill>
+                  <a:srgbClr val="1C2A33"/>
+                </a:solidFill>
+                <a:latin typeface="楷体"/>
+                <a:ea typeface="楷体"/>
+                <a:cs typeface="楷体"/>
+              </a:rPr>
+              <a:t>基础 · 提高</a:t>
+            </a:r>
+          </a:p>
+        </p:txBody>
+      </p:sp>
+      <p:sp>
+        <p:nvSpPr>
+          <p:cNvPr id="6" name="Rounded Rectangle 5"/>
           <p:cNvSpPr/>
           <p:nvPr/>
         </p:nvSpPr>
         <p:spPr>
           <a:xfrm>
-            <a:off x="640080" y="1417320"/>
-            <a:ext cx="10911535" cy="1417320"/>
+            <a:off x="640080" y="2194560"/>
+            <a:ext cx="5250027" cy="4023360"/>
           </a:xfrm>
           <a:prstGeom prst="roundRect">
             <a:avLst/>
@@ -7879,7 +8411,131 @@
           <a:solidFill>
             <a:srgbClr val="FFFFFF"/>
           </a:solidFill>
-          <a:ln w="22860">
+          <a:ln w="20320">
+            <a:solidFill>
+              <a:srgbClr val="B23A2A"/>
+            </a:solidFill>
+          </a:ln>
+          <a:effectLst/>
+        </p:spPr>
+        <p:style>
+          <a:lnRef idx="1">
+            <a:schemeClr val="accent1"/>
+          </a:lnRef>
+          <a:fillRef idx="3">
+            <a:schemeClr val="accent1"/>
+          </a:fillRef>
+          <a:effectRef idx="2">
+            <a:schemeClr val="accent1"/>
+          </a:effectRef>
+          <a:fontRef idx="minor">
+            <a:schemeClr val="lt1"/>
+          </a:fontRef>
+        </p:style>
+        <p:txBody>
+          <a:bodyPr rtlCol="0" anchor="ctr"/>
+          <a:lstStyle/>
+          <a:p>
+            <a:pPr algn="ctr"/>
+          </a:p>
+        </p:txBody>
+      </p:sp>
+      <p:sp>
+        <p:nvSpPr>
+          <p:cNvPr id="7" name="TextBox 6"/>
+          <p:cNvSpPr txBox="1"/>
+          <p:nvPr/>
+        </p:nvSpPr>
+        <p:spPr>
+          <a:xfrm>
+            <a:off x="914400" y="2423160"/>
+            <a:ext cx="4701387" cy="457200"/>
+          </a:xfrm>
+          <a:prstGeom prst="rect">
+            <a:avLst/>
+          </a:prstGeom>
+          <a:noFill/>
+        </p:spPr>
+        <p:txBody>
+          <a:bodyPr wrap="square" anchor="t" lIns="0" rIns="0" tIns="0" bIns="0">
+            <a:spAutoFit/>
+          </a:bodyPr>
+          <a:lstStyle/>
+          <a:p>
+            <a:pPr algn="l"/>
+            <a:r>
+              <a:rPr sz="1700" b="1">
+                <a:solidFill>
+                  <a:srgbClr val="B23A2A"/>
+                </a:solidFill>
+                <a:latin typeface="楷体"/>
+                <a:ea typeface="楷体"/>
+                <a:cs typeface="楷体"/>
+              </a:rPr>
+              <a:t>基础 · 必做</a:t>
+            </a:r>
+          </a:p>
+        </p:txBody>
+      </p:sp>
+      <p:sp>
+        <p:nvSpPr>
+          <p:cNvPr id="8" name="TextBox 7"/>
+          <p:cNvSpPr txBox="1"/>
+          <p:nvPr/>
+        </p:nvSpPr>
+        <p:spPr>
+          <a:xfrm>
+            <a:off x="914400" y="3063240"/>
+            <a:ext cx="4701387" cy="2926080"/>
+          </a:xfrm>
+          <a:prstGeom prst="rect">
+            <a:avLst/>
+          </a:prstGeom>
+          <a:noFill/>
+        </p:spPr>
+        <p:txBody>
+          <a:bodyPr wrap="square" anchor="t" lIns="0" rIns="0" tIns="0" bIns="0">
+            <a:spAutoFit/>
+          </a:bodyPr>
+          <a:lstStyle/>
+          <a:p>
+            <a:pPr algn="l">
+              <a:lnSpc>
+                <a:spcPct val="150000"/>
+              </a:lnSpc>
+            </a:pPr>
+            <a:r>
+              <a:rPr sz="1350" b="0">
+                <a:solidFill>
+                  <a:srgbClr val="1C2A33"/>
+                </a:solidFill>
+                <a:latin typeface="楷体"/>
+                <a:ea typeface="楷体"/>
+                <a:cs typeface="楷体"/>
+              </a:rPr>
+              <a:t>1. 用交叉分类法说明Na2SO4的归属。2. 树状分类填：纯净物分为__、__。3. 如何用实验区分NaCl溶液与淀粉胶体？</a:t>
+            </a:r>
+          </a:p>
+        </p:txBody>
+      </p:sp>
+      <p:sp>
+        <p:nvSpPr>
+          <p:cNvPr id="9" name="Rounded Rectangle 8"/>
+          <p:cNvSpPr/>
+          <p:nvPr/>
+        </p:nvSpPr>
+        <p:spPr>
+          <a:xfrm>
+            <a:off x="6301587" y="2194560"/>
+            <a:ext cx="5250027" cy="4023360"/>
+          </a:xfrm>
+          <a:prstGeom prst="roundRect">
+            <a:avLst/>
+          </a:prstGeom>
+          <a:solidFill>
+            <a:srgbClr val="FFFFFF"/>
+          </a:solidFill>
+          <a:ln w="20320">
             <a:solidFill>
               <a:srgbClr val="2E7D6B"/>
             </a:solidFill>
@@ -7910,14 +8566,14 @@
       </p:sp>
       <p:sp>
         <p:nvSpPr>
-          <p:cNvPr id="6" name="TextBox 5"/>
+          <p:cNvPr id="10" name="TextBox 9"/>
           <p:cNvSpPr txBox="1"/>
           <p:nvPr/>
         </p:nvSpPr>
         <p:spPr>
           <a:xfrm>
-            <a:off x="1371600" y="1527048"/>
-            <a:ext cx="9997135" cy="457200"/>
+            <a:off x="6575907" y="2423160"/>
+            <a:ext cx="4701387" cy="457200"/>
           </a:xfrm>
           <a:prstGeom prst="rect">
             <a:avLst/>
@@ -7930,122 +8586,31 @@
           </a:bodyPr>
           <a:lstStyle/>
           <a:p>
-            <a:pPr algn="l">
-              <a:lnSpc>
-                <a:spcPct val="110000"/>
-              </a:lnSpc>
-            </a:pPr>
-            <a:r>
-              <a:rPr sz="1600" b="1">
-                <a:solidFill>
-                  <a:srgbClr val="1C2A33"/>
-                </a:solidFill>
-                <a:latin typeface="微软雅黑"/>
-                <a:ea typeface="微软雅黑"/>
-                <a:cs typeface="微软雅黑"/>
-              </a:rPr>
-              <a:t/>
-            </a:r>
-          </a:p>
-        </p:txBody>
-      </p:sp>
-      <p:sp>
-        <p:nvSpPr>
-          <p:cNvPr id="7" name="TextBox 6"/>
-          <p:cNvSpPr txBox="1"/>
-          <p:nvPr/>
-        </p:nvSpPr>
-        <p:spPr>
-          <a:xfrm>
-            <a:off x="1371600" y="1965960"/>
-            <a:ext cx="9997135" cy="777240"/>
-          </a:xfrm>
-          <a:prstGeom prst="rect">
-            <a:avLst/>
-          </a:prstGeom>
-          <a:noFill/>
-        </p:spPr>
-        <p:txBody>
-          <a:bodyPr wrap="square" anchor="t" lIns="0" rIns="0" tIns="0" bIns="0">
-            <a:spAutoFit/>
-          </a:bodyPr>
-          <a:lstStyle/>
-          <a:p>
-            <a:pPr algn="l">
-              <a:lnSpc>
-                <a:spcPct val="128000"/>
-              </a:lnSpc>
-            </a:pPr>
-            <a:r>
-              <a:rPr sz="1100" b="0">
-                <a:solidFill>
-                  <a:srgbClr val="1C2A33"/>
+            <a:pPr algn="l"/>
+            <a:r>
+              <a:rPr sz="1700" b="1">
+                <a:solidFill>
+                  <a:srgbClr val="2E7D6B"/>
                 </a:solidFill>
                 <a:latin typeface="楷体"/>
                 <a:ea typeface="楷体"/>
                 <a:cs typeface="楷体"/>
               </a:rPr>
-              <a:t>【基础作业】1. 用交叉分类法说明Na2SO4的归属。2. 树状分类填：纯净物分为__、__。3. 如何用实验区分NaCl溶液与淀粉胶体？</a:t>
-            </a:r>
-          </a:p>
-        </p:txBody>
-      </p:sp>
-      <p:sp>
-        <p:nvSpPr>
-          <p:cNvPr id="8" name="Rounded Rectangle 7"/>
-          <p:cNvSpPr/>
-          <p:nvPr/>
-        </p:nvSpPr>
-        <p:spPr>
-          <a:xfrm>
-            <a:off x="640080" y="2971800"/>
-            <a:ext cx="10911535" cy="1417320"/>
-          </a:xfrm>
-          <a:prstGeom prst="roundRect">
-            <a:avLst/>
-          </a:prstGeom>
-          <a:solidFill>
-            <a:srgbClr val="FFFFFF"/>
-          </a:solidFill>
-          <a:ln w="22860">
-            <a:solidFill>
-              <a:srgbClr val="2E7D6B"/>
-            </a:solidFill>
-          </a:ln>
-          <a:effectLst/>
-        </p:spPr>
-        <p:style>
-          <a:lnRef idx="1">
-            <a:schemeClr val="accent1"/>
-          </a:lnRef>
-          <a:fillRef idx="3">
-            <a:schemeClr val="accent1"/>
-          </a:fillRef>
-          <a:effectRef idx="2">
-            <a:schemeClr val="accent1"/>
-          </a:effectRef>
-          <a:fontRef idx="minor">
-            <a:schemeClr val="lt1"/>
-          </a:fontRef>
-        </p:style>
-        <p:txBody>
-          <a:bodyPr rtlCol="0" anchor="ctr"/>
-          <a:lstStyle/>
-          <a:p>
-            <a:pPr algn="ctr"/>
-          </a:p>
-        </p:txBody>
-      </p:sp>
-      <p:sp>
-        <p:nvSpPr>
-          <p:cNvPr id="9" name="TextBox 8"/>
+              <a:t>提高 · 选做</a:t>
+            </a:r>
+          </a:p>
+        </p:txBody>
+      </p:sp>
+      <p:sp>
+        <p:nvSpPr>
+          <p:cNvPr id="11" name="TextBox 10"/>
           <p:cNvSpPr txBox="1"/>
           <p:nvPr/>
         </p:nvSpPr>
         <p:spPr>
           <a:xfrm>
-            <a:off x="1371600" y="3081528"/>
-            <a:ext cx="9997135" cy="457200"/>
+            <a:off x="6575907" y="3063240"/>
+            <a:ext cx="4701387" cy="2926080"/>
           </a:xfrm>
           <a:prstGeom prst="rect">
             <a:avLst/>
@@ -8060,52 +8625,11 @@
           <a:p>
             <a:pPr algn="l">
               <a:lnSpc>
-                <a:spcPct val="110000"/>
+                <a:spcPct val="150000"/>
               </a:lnSpc>
             </a:pPr>
             <a:r>
-              <a:rPr sz="1600" b="1">
-                <a:solidFill>
-                  <a:srgbClr val="1C2A33"/>
-                </a:solidFill>
-                <a:latin typeface="微软雅黑"/>
-                <a:ea typeface="微软雅黑"/>
-                <a:cs typeface="微软雅黑"/>
-              </a:rPr>
-              <a:t/>
-            </a:r>
-          </a:p>
-        </p:txBody>
-      </p:sp>
-      <p:sp>
-        <p:nvSpPr>
-          <p:cNvPr id="10" name="TextBox 9"/>
-          <p:cNvSpPr txBox="1"/>
-          <p:nvPr/>
-        </p:nvSpPr>
-        <p:spPr>
-          <a:xfrm>
-            <a:off x="1371600" y="3520440"/>
-            <a:ext cx="9997135" cy="777240"/>
-          </a:xfrm>
-          <a:prstGeom prst="rect">
-            <a:avLst/>
-          </a:prstGeom>
-          <a:noFill/>
-        </p:spPr>
-        <p:txBody>
-          <a:bodyPr wrap="square" anchor="t" lIns="0" rIns="0" tIns="0" bIns="0">
-            <a:spAutoFit/>
-          </a:bodyPr>
-          <a:lstStyle/>
-          <a:p>
-            <a:pPr algn="l">
-              <a:lnSpc>
-                <a:spcPct val="128000"/>
-              </a:lnSpc>
-            </a:pPr>
-            <a:r>
-              <a:rPr sz="1200" b="0">
+              <a:rPr sz="1350" b="0">
                 <a:solidFill>
                   <a:srgbClr val="1C2A33"/>
                 </a:solidFill>
@@ -8113,14 +8637,14 @@
                 <a:ea typeface="楷体"/>
                 <a:cs typeface="楷体"/>
               </a:rPr>
-              <a:t>【提高作业】设计表格对CuO、HCl、NaOH、CaCO3、空气进行分类（按单质/化合物/混合物与酸碱性）。</a:t>
-            </a:r>
-          </a:p>
-        </p:txBody>
-      </p:sp>
-      <p:sp>
-        <p:nvSpPr>
-          <p:cNvPr id="11" name="TextBox 10"/>
+              <a:t>设计表格对CuO、HCl、NaOH、CaCO3、空气进行分类（按单质/化合物/混合物与酸碱性）。</a:t>
+            </a:r>
+          </a:p>
+        </p:txBody>
+      </p:sp>
+      <p:sp>
+        <p:nvSpPr>
+          <p:cNvPr id="12" name="TextBox 11"/>
           <p:cNvSpPr txBox="1"/>
           <p:nvPr/>
         </p:nvSpPr>
@@ -8247,13 +8771,13 @@
             <a:r>
               <a:rPr sz="1300" b="1">
                 <a:solidFill>
-                  <a:srgbClr val="C8A86B"/>
+                  <a:srgbClr val="B23A2A"/>
                 </a:solidFill>
                 <a:latin typeface="微软雅黑"/>
                 <a:ea typeface="微软雅黑"/>
                 <a:cs typeface="微软雅黑"/>
               </a:rPr>
-              <a:t>本课小结</a:t>
+              <a:t>单元小结</a:t>
             </a:r>
           </a:p>
         </p:txBody>
@@ -8273,7 +8797,7 @@
             <a:avLst/>
           </a:prstGeom>
           <a:solidFill>
-            <a:srgbClr val="C8A86B"/>
+            <a:srgbClr val="B23A2A"/>
           </a:solidFill>
           <a:ln>
             <a:noFill/>
@@ -8304,20 +8828,57 @@
       </p:sp>
       <p:sp>
         <p:nvSpPr>
-          <p:cNvPr id="5" name="Rectangle 4"/>
+          <p:cNvPr id="5" name="TextBox 4"/>
+          <p:cNvSpPr txBox="1"/>
+          <p:nvPr/>
+        </p:nvSpPr>
+        <p:spPr>
+          <a:xfrm>
+            <a:off x="640080" y="1325880"/>
+            <a:ext cx="10515600" cy="548640"/>
+          </a:xfrm>
+          <a:prstGeom prst="rect">
+            <a:avLst/>
+          </a:prstGeom>
+          <a:noFill/>
+        </p:spPr>
+        <p:txBody>
+          <a:bodyPr wrap="square" anchor="t" lIns="0" rIns="0" tIns="0" bIns="0">
+            <a:spAutoFit/>
+          </a:bodyPr>
+          <a:lstStyle/>
+          <a:p>
+            <a:pPr algn="l"/>
+            <a:r>
+              <a:rPr sz="2800" b="1">
+                <a:solidFill>
+                  <a:srgbClr val="1C2A33"/>
+                </a:solidFill>
+                <a:latin typeface="楷体"/>
+                <a:ea typeface="楷体"/>
+                <a:cs typeface="楷体"/>
+              </a:rPr>
+              <a:t>本单元脉络与衔接</a:t>
+            </a:r>
+          </a:p>
+        </p:txBody>
+      </p:sp>
+      <p:sp>
+        <p:nvSpPr>
+          <p:cNvPr id="6" name="Rounded Rectangle 5"/>
           <p:cNvSpPr/>
           <p:nvPr/>
         </p:nvSpPr>
         <p:spPr>
           <a:xfrm>
-            <a:off x="640080" y="1737360"/>
-            <a:ext cx="54864" cy="431800"/>
-          </a:xfrm>
-          <a:prstGeom prst="rect">
+            <a:off x="640080" y="2011680"/>
+            <a:ext cx="5227167" cy="4480560"/>
+          </a:xfrm>
+          <a:prstGeom prst="roundRect">
             <a:avLst/>
           </a:prstGeom>
           <a:solidFill>
-            <a:srgbClr val="C8A86B"/>
+            <a:srgbClr val="1C2A33"/>
           </a:solidFill>
           <a:ln>
             <a:noFill/>
@@ -8348,14 +8909,132 @@
       </p:sp>
       <p:sp>
         <p:nvSpPr>
-          <p:cNvPr id="6" name="TextBox 5"/>
+          <p:cNvPr id="7" name="TextBox 6"/>
           <p:cNvSpPr txBox="1"/>
           <p:nvPr/>
         </p:nvSpPr>
         <p:spPr>
           <a:xfrm>
-            <a:off x="868680" y="1645920"/>
-            <a:ext cx="10682935" cy="2194560"/>
+            <a:off x="914400" y="2194560"/>
+            <a:ext cx="4678527" cy="457200"/>
+          </a:xfrm>
+          <a:prstGeom prst="rect">
+            <a:avLst/>
+          </a:prstGeom>
+          <a:noFill/>
+        </p:spPr>
+        <p:txBody>
+          <a:bodyPr wrap="square" anchor="t" lIns="0" rIns="0" tIns="0" bIns="0">
+            <a:spAutoFit/>
+          </a:bodyPr>
+          <a:lstStyle/>
+          <a:p>
+            <a:pPr algn="l"/>
+            <a:r>
+              <a:rPr sz="1700" b="1">
+                <a:solidFill>
+                  <a:srgbClr val="C8A86B"/>
+                </a:solidFill>
+                <a:latin typeface="楷体"/>
+                <a:ea typeface="楷体"/>
+                <a:cs typeface="楷体"/>
+              </a:rPr>
+              <a:t>本单元定位</a:t>
+            </a:r>
+          </a:p>
+        </p:txBody>
+      </p:sp>
+      <p:sp>
+        <p:nvSpPr>
+          <p:cNvPr id="8" name="TextBox 7"/>
+          <p:cNvSpPr txBox="1"/>
+          <p:nvPr/>
+        </p:nvSpPr>
+        <p:spPr>
+          <a:xfrm>
+            <a:off x="914400" y="2743200"/>
+            <a:ext cx="4678527" cy="3566160"/>
+          </a:xfrm>
+          <a:prstGeom prst="rect">
+            <a:avLst/>
+          </a:prstGeom>
+          <a:noFill/>
+        </p:spPr>
+        <p:txBody>
+          <a:bodyPr wrap="square" anchor="t" lIns="0" rIns="0" tIns="0" bIns="0">
+            <a:spAutoFit/>
+          </a:bodyPr>
+          <a:lstStyle/>
+          <a:p>
+            <a:pPr algn="l">
+              <a:lnSpc>
+                <a:spcPct val="155000"/>
+              </a:lnSpc>
+              <a:spcAft>
+                <a:spcPts val="600"/>
+              </a:spcAft>
+            </a:pPr>
+            <a:r>
+              <a:rPr sz="1400" b="0">
+                <a:solidFill>
+                  <a:srgbClr val="FFFFFF"/>
+                </a:solidFill>
+                <a:latin typeface="楷体"/>
+                <a:ea typeface="楷体"/>
+                <a:cs typeface="楷体"/>
+              </a:rPr>
+              <a:t>在初中混合物/纯净物、单质/化合物基础上，建立"交叉分类法"与"树状分类法"两种分类思路，并引入分散系（溶液、胶体、浊液），以丁达尔效应区分胶体。分类是化学研究的重要方法，为后续离子反应、氧化还原建立认知框架。</a:t>
+            </a:r>
+          </a:p>
+        </p:txBody>
+      </p:sp>
+      <p:sp>
+        <p:nvSpPr>
+          <p:cNvPr id="9" name="TextBox 8"/>
+          <p:cNvSpPr txBox="1"/>
+          <p:nvPr/>
+        </p:nvSpPr>
+        <p:spPr>
+          <a:xfrm>
+            <a:off x="6324447" y="2011680"/>
+            <a:ext cx="5227167" cy="457200"/>
+          </a:xfrm>
+          <a:prstGeom prst="rect">
+            <a:avLst/>
+          </a:prstGeom>
+          <a:noFill/>
+        </p:spPr>
+        <p:txBody>
+          <a:bodyPr wrap="square" anchor="t" lIns="0" rIns="0" tIns="0" bIns="0">
+            <a:spAutoFit/>
+          </a:bodyPr>
+          <a:lstStyle/>
+          <a:p>
+            <a:pPr algn="l"/>
+            <a:r>
+              <a:rPr sz="1700" b="1">
+                <a:solidFill>
+                  <a:srgbClr val="B23A2A"/>
+                </a:solidFill>
+                <a:latin typeface="楷体"/>
+                <a:ea typeface="楷体"/>
+                <a:cs typeface="楷体"/>
+              </a:rPr>
+              <a:t>重点梳理</a:t>
+            </a:r>
+          </a:p>
+        </p:txBody>
+      </p:sp>
+      <p:sp>
+        <p:nvSpPr>
+          <p:cNvPr id="10" name="TextBox 9"/>
+          <p:cNvSpPr txBox="1"/>
+          <p:nvPr/>
+        </p:nvSpPr>
+        <p:spPr>
+          <a:xfrm>
+            <a:off x="6324447" y="2560320"/>
+            <a:ext cx="5227167" cy="3840480"/>
           </a:xfrm>
           <a:prstGeom prst="rect">
             <a:avLst/>
@@ -8377,7 +9056,7 @@
               </a:spcAft>
             </a:pPr>
             <a:r>
-              <a:rPr sz="2200" b="0">
+              <a:rPr sz="1500" b="0">
                 <a:solidFill>
                   <a:srgbClr val="1C2A33"/>
                 </a:solidFill>
@@ -8385,28 +9064,98 @@
                 <a:ea typeface="楷体"/>
                 <a:cs typeface="楷体"/>
               </a:rPr>
-              <a:t>本单元主题：物质及其变化。把今天学到的方法带进下一篇——自己读、自己想、自己写。</a:t>
-            </a:r>
-          </a:p>
-          <a:p>
-            <a:pPr algn="l"/>
-            <a:r>
-              <a:rPr sz="1600" b="1">
-                <a:solidFill>
-                  <a:srgbClr val="B23A2A"/>
-                </a:solidFill>
-                <a:latin typeface="微软雅黑"/>
-                <a:ea typeface="微软雅黑"/>
-                <a:cs typeface="微软雅黑"/>
+              <a:t>· 交叉分类</a:t>
+            </a:r>
+          </a:p>
+          <a:p>
+            <a:pPr algn="l">
+              <a:lnSpc>
+                <a:spcPct val="150000"/>
+              </a:lnSpc>
+              <a:spcAft>
+                <a:spcPts val="1000"/>
+              </a:spcAft>
+            </a:pPr>
+            <a:r>
+              <a:rPr sz="1500" b="0">
+                <a:solidFill>
+                  <a:srgbClr val="1C2A33"/>
+                </a:solidFill>
+                <a:latin typeface="楷体"/>
+                <a:ea typeface="楷体"/>
+                <a:cs typeface="楷体"/>
               </a:rPr>
-              <a:t>方法迁移：圈关键信息 → 理事件脉络 → 析人物精神</a:t>
-            </a:r>
-          </a:p>
-        </p:txBody>
-      </p:sp>
-      <p:sp>
-        <p:nvSpPr>
-          <p:cNvPr id="7" name="TextBox 6"/>
+              <a:t>· 树状分类</a:t>
+            </a:r>
+          </a:p>
+          <a:p>
+            <a:pPr algn="l">
+              <a:lnSpc>
+                <a:spcPct val="150000"/>
+              </a:lnSpc>
+              <a:spcAft>
+                <a:spcPts val="1000"/>
+              </a:spcAft>
+            </a:pPr>
+            <a:r>
+              <a:rPr sz="1500" b="0">
+                <a:solidFill>
+                  <a:srgbClr val="1C2A33"/>
+                </a:solidFill>
+                <a:latin typeface="楷体"/>
+                <a:ea typeface="楷体"/>
+                <a:cs typeface="楷体"/>
+              </a:rPr>
+              <a:t>· 分散系</a:t>
+            </a:r>
+          </a:p>
+          <a:p>
+            <a:pPr algn="l">
+              <a:lnSpc>
+                <a:spcPct val="150000"/>
+              </a:lnSpc>
+              <a:spcAft>
+                <a:spcPts val="1000"/>
+              </a:spcAft>
+            </a:pPr>
+            <a:r>
+              <a:rPr sz="1500" b="0">
+                <a:solidFill>
+                  <a:srgbClr val="1C2A33"/>
+                </a:solidFill>
+                <a:latin typeface="楷体"/>
+                <a:ea typeface="楷体"/>
+                <a:cs typeface="楷体"/>
+              </a:rPr>
+              <a:t>· 胶体特性</a:t>
+            </a:r>
+          </a:p>
+          <a:p>
+            <a:pPr algn="l">
+              <a:lnSpc>
+                <a:spcPct val="150000"/>
+              </a:lnSpc>
+              <a:spcAft>
+                <a:spcPts val="400"/>
+              </a:spcAft>
+            </a:pPr>
+            <a:r>
+              <a:rPr sz="1350" b="0">
+                <a:solidFill>
+                  <a:srgbClr val="6B6258"/>
+                </a:solidFill>
+                <a:latin typeface="楷体"/>
+                <a:ea typeface="楷体"/>
+                <a:cs typeface="楷体"/>
+              </a:rPr>
+              <a:t>后续衔接：下节课学物质的转化关系(酸、碱、盐、氧化物相互联系)</a:t>
+            </a:r>
+          </a:p>
+        </p:txBody>
+      </p:sp>
+      <p:sp>
+        <p:nvSpPr>
+          <p:cNvPr id="11" name="TextBox 10"/>
           <p:cNvSpPr txBox="1"/>
           <p:nvPr/>
         </p:nvSpPr>
